--- a/slides/实验室安全答辩.pptx
+++ b/slides/实验室安全答辩.pptx
@@ -128,26 +128,26 @@
   <p:extLst>
     <p:ext uri="{521415D9-36F7-43E2-AB2F-B90AF26B5E84}">
       <p14:sectionLst xmlns:p14="http://schemas.microsoft.com/office/powerpoint/2010/main">
-        <p14:section name="片头" id="{7db5f978-7b61-293d-4031-ff1a78f0aa1c}">
+        <p14:section name="片头" id="{4e06d3b2-11b4-3d14-77bd-e58ec7dc448a}">
           <p14:sldIdLst>
             <p14:sldId id="256"/>
           </p14:sldIdLst>
         </p14:section>
-        <p14:section name="需求" id="{0777bde4-7b88-9075-ff0f-8f444a18bc0f}">
+        <p14:section name="需求" id="{af6e53ed-b92a-c82a-eb47-3fa20d8e16ff}">
           <p14:sldIdLst>
             <p14:sldId id="257"/>
             <p14:sldId id="258"/>
             <p14:sldId id="259"/>
           </p14:sldIdLst>
         </p14:section>
-        <p14:section name="识别" id="{888b3695-722a-ab95-73df-7b18b4448e9d}">
+        <p14:section name="识别" id="{6bdc3457-5242-8444-6083-6e03f574286f}">
           <p14:sldIdLst>
             <p14:sldId id="260"/>
             <p14:sldId id="261"/>
             <p14:sldId id="262"/>
           </p14:sldIdLst>
         </p14:section>
-        <p14:section name="面向学生" id="{5164bec4-0c9f-bf6f-8528-9ef3f60aafd1}">
+        <p14:section name="面向学生" id="{ddb5fc39-32d7-6cf7-f387-54150450778a}">
           <p14:sldIdLst>
             <p14:sldId id="263"/>
             <p14:sldId id="264"/>
@@ -157,13 +157,13 @@
             <p14:sldId id="268"/>
           </p14:sldIdLst>
         </p14:section>
-        <p14:section name="总后台" id="{026a760d-a619-334a-ad30-d57db4f51404}">
+        <p14:section name="总后台" id="{72f8b94e-9572-d802-7b3a-fe99e6c29e0a}">
           <p14:sldIdLst>
             <p14:sldId id="269"/>
             <p14:sldId id="270"/>
           </p14:sldIdLst>
         </p14:section>
-        <p14:section name="工程实现" id="{5301549e-550d-c137-0b0f-c3437b370aa0}">
+        <p14:section name="工程实现" id="{70034a2d-29f4-0192-6167-7ec26180af5b}">
           <p14:sldIdLst>
             <p14:sldId id="271"/>
             <p14:sldId id="272"/>
@@ -173,7 +173,7 @@
             <p14:sldId id="276"/>
           </p14:sldIdLst>
         </p14:section>
-        <p14:section name="结尾" id="{6e6bfa7a-2da7-9044-acaa-7a1fd3bbc063}">
+        <p14:section name="结尾" id="{9cc72976-e2f0-08d0-dbf9-d6db2f1ffffe}">
           <p14:sldIdLst>
             <p14:sldId id="277"/>
           </p14:sldIdLst>
@@ -213,7 +213,7 @@
                 </a:solidFill>
                 <a:latin typeface="+mn-lt"/>
               </a:rPr>
-              <a:t>验证集指标随 epoch 变化</a:t>
+              <a:t>验证集指标随轮次变化（横轴：轮次）</a:t>
             </a:r>
           </a:p>
         </c:rich>
@@ -242,11 +242,11 @@
           </c:tx>
           <c:spPr>
             <a:solidFill>
-              <a:srgbClr val="1A1F3D"/>
+              <a:srgbClr val="2A78D6"/>
             </a:solidFill>
             <a:ln w="25400" cap="flat">
               <a:solidFill>
-                <a:srgbClr val="1A1F3D"/>
+                <a:srgbClr val="2A78D6"/>
               </a:solidFill>
               <a:prstDash val="solid"/>
               <a:round/>
@@ -283,11 +283,11 @@
             <c:size val="6"/>
             <c:spPr>
               <a:solidFill>
-                <a:srgbClr val="1A1F3D"/>
+                <a:srgbClr val="2A78D6"/>
               </a:solidFill>
               <a:ln w="9525" cap="flat">
                 <a:solidFill>
-                  <a:srgbClr val="1A1F3D"/>
+                  <a:srgbClr val="2A78D6"/>
                 </a:solidFill>
                 <a:prstDash val="solid"/>
                 <a:round/>
@@ -812,11 +812,11 @@
           </c:tx>
           <c:spPr>
             <a:solidFill>
-              <a:srgbClr val="9AA4D6"/>
+              <a:srgbClr val="EB6834"/>
             </a:solidFill>
             <a:ln w="25400" cap="flat">
               <a:solidFill>
-                <a:srgbClr val="9AA4D6"/>
+                <a:srgbClr val="EB6834"/>
               </a:solidFill>
               <a:prstDash val="solid"/>
               <a:round/>
@@ -853,11 +853,11 @@
             <c:size val="6"/>
             <c:spPr>
               <a:solidFill>
-                <a:srgbClr val="9AA4D6"/>
+                <a:srgbClr val="EB6834"/>
               </a:solidFill>
               <a:ln w="9525" cap="flat">
                 <a:solidFill>
-                  <a:srgbClr val="9AA4D6"/>
+                  <a:srgbClr val="EB6834"/>
                 </a:solidFill>
                 <a:prstDash val="solid"/>
                 <a:round/>
@@ -1560,7 +1560,7 @@
                 </a:solidFill>
                 <a:latin typeface="+mn-lt"/>
               </a:rPr>
-              <a:t>验证集指标随 epoch 变化</a:t>
+              <a:t>验证集指标随轮次变化（横轴：轮次）</a:t>
             </a:r>
           </a:p>
         </c:rich>
@@ -1589,11 +1589,11 @@
           </c:tx>
           <c:spPr>
             <a:solidFill>
-              <a:srgbClr val="1A1F3D"/>
+              <a:srgbClr val="2A78D6"/>
             </a:solidFill>
             <a:ln w="25400" cap="flat">
               <a:solidFill>
-                <a:srgbClr val="1A1F3D"/>
+                <a:srgbClr val="2A78D6"/>
               </a:solidFill>
               <a:prstDash val="solid"/>
               <a:round/>
@@ -1630,11 +1630,11 @@
             <c:size val="6"/>
             <c:spPr>
               <a:solidFill>
-                <a:srgbClr val="1A1F3D"/>
+                <a:srgbClr val="2A78D6"/>
               </a:solidFill>
               <a:ln w="9525" cap="flat">
                 <a:solidFill>
-                  <a:srgbClr val="1A1F3D"/>
+                  <a:srgbClr val="2A78D6"/>
                 </a:solidFill>
                 <a:prstDash val="solid"/>
                 <a:round/>
@@ -1979,11 +1979,11 @@
           </c:tx>
           <c:spPr>
             <a:solidFill>
-              <a:srgbClr val="9AA4D6"/>
+              <a:srgbClr val="EB6834"/>
             </a:solidFill>
             <a:ln w="25400" cap="flat">
               <a:solidFill>
-                <a:srgbClr val="9AA4D6"/>
+                <a:srgbClr val="EB6834"/>
               </a:solidFill>
               <a:prstDash val="solid"/>
               <a:round/>
@@ -2020,11 +2020,11 @@
             <c:size val="6"/>
             <c:spPr>
               <a:solidFill>
-                <a:srgbClr val="9AA4D6"/>
+                <a:srgbClr val="EB6834"/>
               </a:solidFill>
               <a:ln w="9525" cap="flat">
                 <a:solidFill>
-                  <a:srgbClr val="9AA4D6"/>
+                  <a:srgbClr val="EB6834"/>
                 </a:solidFill>
                 <a:prstDash val="solid"/>
                 <a:round/>
@@ -3180,7 +3180,7 @@
           <a:p>
             <a:r>
               <a:rPr lang="en-US" dirty="0"/>
-              <a:t>安全助手读取打分结果和安全手册，写原因、步骤和条款；三条线路：通义千问、本地 Ollama、离线规则模板。工具表只有 4 个只读工具。</a:t>
+              <a:t>安全助手读取打分结果和安全手册，写原因、步骤和条款；三条线路：通义千问、本地 Ollama、离线规则模板。工具表只有 5 个只读工具。</a:t>
             </a:r>
             <a:endParaRPr lang="en-US" dirty="0"/>
           </a:p>
@@ -3268,7 +3268,7 @@
           <a:p>
             <a:r>
               <a:rPr lang="en-US" dirty="0"/>
-              <a:t>断电链路：开发板发 POWER_OFF，控制盒断继电器回 ACK，0.25 s 超时重发最多 3 次，往返中位 4.9 ms。控制盒另有 150℃、烟雾 2500、心跳 30 s 的本地硬规则。只断不通。</a:t>
+              <a:t>断电链路：开发板发 POWER_OFF，控制盒断继电器回 ACK，0.25 s 超时重发，最多发送 3 次，往返中位 4.9 ms。控制盒另有 150℃、烟雾 2500、心跳 30 s 的本地硬规则。只断不通。</a:t>
             </a:r>
             <a:endParaRPr lang="en-US" dirty="0"/>
           </a:p>
@@ -3620,7 +3620,7 @@
           <a:p>
             <a:r>
               <a:rPr lang="en-US" dirty="0"/>
-              <a:t>心跳不是定时器发的：只有安全判断每次跑完调用 feed()，发送线程才发心跳。程序卡死 5 s 心跳就停，控制盒 30 s 收不到心跳且仍在加热就本地断电。</a:t>
+              <a:t>心跳不是定时器发的：只有安全判断每次跑完调用 feed()，发送线程才发心跳。程序卡死 5 s 心跳就停，控制盒 30 s 收不到心跳、继电器闭合且热源高于 60℃（测不到温度也算）就本地断电。</a:t>
             </a:r>
             <a:endParaRPr lang="en-US" dirty="0"/>
           </a:p>
@@ -3708,7 +3708,7 @@
           <a:p>
             <a:r>
               <a:rPr lang="en-US" dirty="0"/>
-              <a:t>帧格式：AA 55 帧头、长度、序号、命令、负载、CRC16-CCITT 小端。断电指令要 ACK，0.25 s 超时重发，最多 3 次。固件和仿真下位机共用这一协议。</a:t>
+              <a:t>帧格式：AA 55 帧头、长度、序号、命令、负载、CRC16-CCITT 小端。断电指令要 ACK，0.25 s 超时重发，最多发送 3 次。固件和仿真下位机共用这一协议。</a:t>
             </a:r>
             <a:endParaRPr lang="en-US" dirty="0"/>
           </a:p>
@@ -4500,7 +4500,7 @@
           <a:p>
             <a:r>
               <a:rPr lang="en-US" dirty="0"/>
-              <a:t>人员模型 80 轮，mAP@0.5 为 89.0%；器皿模型 50 轮，mAP@0.5 为 89.3%，mAP@0.5:0.95 为 73.7%。这是验证集上的检测指标，不是事故识别准确率。</a:t>
+              <a:t>人员模型训练 80 轮、取第 77 轮权重，mAP@0.5 为 89.0%；器皿模型 50 轮，mAP@0.5 为 89.3%，mAP@0.5:0.95 为 73.7%。这是验证集上的检测指标，不是事故识别准确率。</a:t>
             </a:r>
             <a:endParaRPr lang="en-US" dirty="0"/>
           </a:p>
@@ -4888,6 +4888,9 @@
                 <a:solidFill>
                   <a:schemeClr val="tx1"/>
                 </a:solidFill>
+                <a:latin typeface="思源宋体" pitchFamily="34" charset="0"/>
+                <a:ea typeface="思源宋体" pitchFamily="34" charset="-122"/>
+                <a:cs typeface="思源宋体" pitchFamily="34" charset="-120"/>
               </a:defRPr>
             </a:lvl1pPr>
           </a:lstStyle>
@@ -4998,6 +5001,9 @@
                 <a:solidFill>
                   <a:schemeClr val="tx1"/>
                 </a:solidFill>
+                <a:latin typeface="思源宋体" pitchFamily="34" charset="0"/>
+                <a:ea typeface="思源宋体" pitchFamily="34" charset="-122"/>
+                <a:cs typeface="思源宋体" pitchFamily="34" charset="-120"/>
               </a:defRPr>
             </a:lvl1pPr>
           </a:lstStyle>
@@ -5150,6 +5156,9 @@
                 <a:solidFill>
                   <a:schemeClr val="tx1"/>
                 </a:solidFill>
+                <a:latin typeface="思源宋体" pitchFamily="34" charset="0"/>
+                <a:ea typeface="思源宋体" pitchFamily="34" charset="-122"/>
+                <a:cs typeface="思源宋体" pitchFamily="34" charset="-120"/>
               </a:defRPr>
             </a:lvl1pPr>
           </a:lstStyle>
@@ -5752,6 +5761,9 @@
                 <a:solidFill>
                   <a:schemeClr val="tx1"/>
                 </a:solidFill>
+                <a:latin typeface="思源宋体" pitchFamily="34" charset="0"/>
+                <a:ea typeface="思源宋体" pitchFamily="34" charset="-122"/>
+                <a:cs typeface="思源宋体" pitchFamily="34" charset="-120"/>
               </a:rPr>
               <a:t>基于双摄协同的实验室安全</a:t>
             </a:r>
@@ -5766,6 +5778,9 @@
                 <a:solidFill>
                   <a:schemeClr val="tx1"/>
                 </a:solidFill>
+                <a:latin typeface="思源宋体" pitchFamily="34" charset="0"/>
+                <a:ea typeface="思源宋体" pitchFamily="34" charset="-122"/>
+                <a:cs typeface="思源宋体" pitchFamily="34" charset="-120"/>
               </a:rPr>
               <a:t>事前干预监测系统</a:t>
             </a:r>
@@ -5899,6 +5914,9 @@
                 <a:solidFill>
                   <a:schemeClr val="tx1"/>
                 </a:solidFill>
+                <a:latin typeface="思源宋体" pitchFamily="34" charset="0"/>
+                <a:ea typeface="思源宋体" pitchFamily="34" charset="-122"/>
+                <a:cs typeface="思源宋体" pitchFamily="34" charset="-120"/>
               </a:rPr>
               <a:t>第一个分叉：风险分三级</a:t>
             </a:r>
@@ -7032,6 +7050,9 @@
                 <a:solidFill>
                   <a:schemeClr val="tx1"/>
                 </a:solidFill>
+                <a:latin typeface="思源宋体" pitchFamily="34" charset="0"/>
+                <a:ea typeface="思源宋体" pitchFamily="34" charset="-122"/>
+                <a:cs typeface="思源宋体" pitchFamily="34" charset="-120"/>
               </a:rPr>
               <a:t>第二个分叉：同一事件，三层各自定级</a:t>
             </a:r>
@@ -8769,6 +8790,9 @@
                 <a:solidFill>
                   <a:schemeClr val="tx1"/>
                 </a:solidFill>
+                <a:latin typeface="思源宋体" pitchFamily="34" charset="0"/>
+                <a:ea typeface="思源宋体" pitchFamily="34" charset="-122"/>
+                <a:cs typeface="思源宋体" pitchFamily="34" charset="-120"/>
               </a:rPr>
               <a:t>安全助手：只读，只建议</a:t>
             </a:r>
@@ -8776,25 +8800,44 @@
           </a:p>
         </p:txBody>
       </p:sp>
-      <p:sp>
-        <p:nvSpPr>
-          <p:cNvPr id="4" name="Shape 1"/>
+      <p:pic>
+        <p:nvPicPr>
+          <p:cNvPr id="4" name="Image 0" descr="事件卡片：预测即将干烧，附处理建议的原因、处置和手册依据">    </p:cNvPr>
+          <p:cNvPicPr>
+            <a:picLocks noChangeAspect="1"/>
+          </p:cNvPicPr>
+          <p:nvPr/>
+        </p:nvPicPr>
+        <p:blipFill>
+          <a:blip r:embed="rId1"/>
+          <a:stretch>
+            <a:fillRect/>
+          </a:stretch>
+        </p:blipFill>
+        <p:spPr>
+          <a:xfrm>
+            <a:off x="758952" y="1417320"/>
+            <a:ext cx="4343400" cy="4061666"/>
+          </a:xfrm>
+          <a:prstGeom prst="rect">
+            <a:avLst/>
+          </a:prstGeom>
+        </p:spPr>
+      </p:pic>
+      <p:sp>
+        <p:nvSpPr>
+          <p:cNvPr id="5" name="Shape 1"/>
           <p:cNvSpPr/>
           <p:nvPr/>
         </p:nvSpPr>
         <p:spPr>
           <a:xfrm>
-            <a:off x="758952" y="1508760"/>
-            <a:ext cx="5715000" cy="3246120"/>
-          </a:xfrm>
-          <a:prstGeom prst="roundRect">
-            <a:avLst>
-              <a:gd name="adj" fmla="val 4507"/>
-            </a:avLst>
-          </a:prstGeom>
-          <a:solidFill>
-            <a:schemeClr val="bg1"/>
-          </a:solidFill>
+            <a:off x="758952" y="1417320"/>
+            <a:ext cx="4343400" cy="4061666"/>
+          </a:xfrm>
+          <a:prstGeom prst="rect">
+            <a:avLst/>
+          </a:prstGeom>
           <a:ln w="9525">
             <a:solidFill>
               <a:srgbClr val="DDE0EA"/>
@@ -8805,14 +8848,14 @@
       </p:sp>
       <p:sp>
         <p:nvSpPr>
-          <p:cNvPr id="5" name="Text 2"/>
-          <p:cNvSpPr txBox="1"/>
-          <p:nvPr/>
-        </p:nvSpPr>
-        <p:spPr>
-          <a:xfrm>
-            <a:off x="1600200" y="1691640"/>
-            <a:ext cx="2743200" cy="411480"/>
+          <p:cNvPr id="6" name="Text 2"/>
+          <p:cNvSpPr txBox="1"/>
+          <p:nvPr/>
+        </p:nvSpPr>
+        <p:spPr>
+          <a:xfrm>
+            <a:off x="758952" y="5552138"/>
+            <a:ext cx="4343400" cy="274320"/>
           </a:xfrm>
           <a:prstGeom prst="rect">
             <a:avLst/>
@@ -8831,53 +8874,14 @@
               <a:buNone/>
             </a:pPr>
             <a:r>
-              <a:rPr lang="en-US" sz="2200" b="1" dirty="0">
-                <a:solidFill>
-                  <a:schemeClr val="tx1"/>
-                </a:solidFill>
-              </a:rPr>
-              <a:t>处置建议</a:t>
-            </a:r>
-            <a:endParaRPr lang="en-US" sz="2200" dirty="0"/>
-          </a:p>
-        </p:txBody>
-      </p:sp>
-      <p:sp>
-        <p:nvSpPr>
-          <p:cNvPr id="6" name="Text 3"/>
-          <p:cNvSpPr txBox="1"/>
-          <p:nvPr/>
-        </p:nvSpPr>
-        <p:spPr>
-          <a:xfrm>
-            <a:off x="3931920" y="1737360"/>
-            <a:ext cx="2331720" cy="320040"/>
-          </a:xfrm>
-          <a:prstGeom prst="rect">
-            <a:avLst/>
-          </a:prstGeom>
-          <a:noFill/>
-          <a:ln/>
-        </p:spPr>
-        <p:txBody>
-          <a:bodyPr wrap="square" lIns="0" tIns="0" rIns="0" bIns="0" rtlCol="0" anchor="t"/>
-          <a:lstStyle/>
-          <a:p>
-            <a:pPr algn="r" indent="0" marL="0">
-              <a:spcAft>
-                <a:spcPts val="400"/>
-              </a:spcAft>
-              <a:buNone/>
-            </a:pPr>
-            <a:r>
-              <a:rPr lang="en-US" sz="1200" dirty="0">
+              <a:rPr lang="en-US" sz="1100" dirty="0">
                 <a:solidFill>
                   <a:schemeClr val="accent6"/>
                 </a:solidFill>
               </a:rPr>
-              <a:t>警告与紧急事件自动生成</a:t>
-            </a:r>
-            <a:endParaRPr lang="en-US" sz="1200" dirty="0"/>
+              <a:t>实机截图：本机控制台事件卡片，处理建议由规则模板生成</a:t>
+            </a:r>
+            <a:endParaRPr lang="en-US" sz="1100" dirty="0"/>
           </a:p>
         </p:txBody>
       </p:sp>
@@ -8889,14 +8893,14 @@
         </p:nvSpPr>
         <p:spPr>
           <a:xfrm>
-            <a:off x="1343660" y="1813560"/>
+            <a:off x="5623560" y="1369060"/>
             <a:ext cx="182880" cy="182880"/>
           </a:xfrm>
           <a:prstGeom prst="ellipse">
             <a:avLst/>
           </a:prstGeom>
           <a:solidFill>
-            <a:schemeClr val="accent3"/>
+            <a:schemeClr val="accent2"/>
           </a:solidFill>
           <a:ln w="19050">
             <a:solidFill>
@@ -8906,7 +8910,7 @@
           </a:ln>
           <a:effectLst>
             <a:outerShdw sx="100000" sy="100000" kx="0" ky="0" algn="bl" rotWithShape="0" blurRad="177800" dist="50800" dir="5400000">
-              <a:srgbClr val="E03A32">
+              <a:srgbClr val="EC9808">
                 <a:alpha val="55000"/>
               </a:srgbClr>
             </a:outerShdw>
@@ -8915,14 +8919,53 @@
       </p:sp>
       <p:sp>
         <p:nvSpPr>
-          <p:cNvPr id="8" name="Text 5"/>
-          <p:cNvSpPr txBox="1"/>
-          <p:nvPr/>
-        </p:nvSpPr>
-        <p:spPr>
-          <a:xfrm>
-            <a:off x="1033272" y="2286000"/>
-            <a:ext cx="1280160" cy="438912"/>
+          <p:cNvPr id="8" name="Text 4"/>
+          <p:cNvSpPr txBox="1"/>
+          <p:nvPr/>
+        </p:nvSpPr>
+        <p:spPr>
+          <a:xfrm>
+            <a:off x="5852160" y="1508760"/>
+            <a:ext cx="5577840" cy="1188720"/>
+          </a:xfrm>
+          <a:prstGeom prst="rect">
+            <a:avLst/>
+          </a:prstGeom>
+          <a:noFill/>
+          <a:ln/>
+        </p:spPr>
+        <p:txBody>
+          <a:bodyPr wrap="square" lIns="0" tIns="0" rIns="0" bIns="0" rtlCol="0" anchor="t"/>
+          <a:lstStyle/>
+          <a:p>
+            <a:pPr indent="0" marL="0">
+              <a:spcAft>
+                <a:spcPts val="400"/>
+              </a:spcAft>
+              <a:buNone/>
+            </a:pPr>
+            <a:r>
+              <a:rPr lang="en-US" sz="1800" dirty="0">
+                <a:solidFill>
+                  <a:schemeClr val="tx2"/>
+                </a:solidFill>
+              </a:rPr>
+              <a:t>读取交叉验证结果和安全手册（BM25 检索），生成原因、步骤和条款引用。工具表只有 5 个只读工具，没有任何电源控制接口。</a:t>
+            </a:r>
+            <a:endParaRPr lang="en-US" sz="1800" dirty="0"/>
+          </a:p>
+        </p:txBody>
+      </p:sp>
+      <p:sp>
+        <p:nvSpPr>
+          <p:cNvPr id="9" name="Text 5"/>
+          <p:cNvSpPr txBox="1"/>
+          <p:nvPr/>
+        </p:nvSpPr>
+        <p:spPr>
+          <a:xfrm>
+            <a:off x="5852160" y="3017520"/>
+            <a:ext cx="3291840" cy="438912"/>
           </a:xfrm>
           <a:prstGeom prst="rect">
             <a:avLst/>
@@ -8941,27 +8984,27 @@
               <a:buNone/>
             </a:pPr>
             <a:r>
-              <a:rPr lang="en-US" sz="1400" dirty="0">
+              <a:rPr lang="en-US" sz="1700" dirty="0">
                 <a:solidFill>
                   <a:schemeClr val="accent6"/>
                 </a:solidFill>
               </a:rPr>
-              <a:t>风险等级</a:t>
-            </a:r>
-            <a:endParaRPr lang="en-US" sz="1400" dirty="0"/>
-          </a:p>
-        </p:txBody>
-      </p:sp>
-      <p:sp>
-        <p:nvSpPr>
-          <p:cNvPr id="9" name="Text 6"/>
-          <p:cNvSpPr txBox="1"/>
-          <p:nvPr/>
-        </p:nvSpPr>
-        <p:spPr>
-          <a:xfrm>
-            <a:off x="2313432" y="2286000"/>
-            <a:ext cx="3931920" cy="438912"/>
+              <a:t>远程通义千问</a:t>
+            </a:r>
+            <a:endParaRPr lang="en-US" sz="1700" dirty="0"/>
+          </a:p>
+        </p:txBody>
+      </p:sp>
+      <p:sp>
+        <p:nvSpPr>
+          <p:cNvPr id="10" name="Text 6"/>
+          <p:cNvSpPr txBox="1"/>
+          <p:nvPr/>
+        </p:nvSpPr>
+        <p:spPr>
+          <a:xfrm>
+            <a:off x="9144000" y="3017520"/>
+            <a:ext cx="2286000" cy="438912"/>
           </a:xfrm>
           <a:prstGeom prst="rect">
             <a:avLst/>
@@ -8980,27 +9023,27 @@
               <a:buNone/>
             </a:pPr>
             <a:r>
-              <a:rPr lang="en-US" sz="1400" dirty="0">
+              <a:rPr lang="en-US" sz="1700" dirty="0">
                 <a:solidFill>
                   <a:schemeClr val="tx1"/>
                 </a:solidFill>
               </a:rPr>
-              <a:t>高危</a:t>
-            </a:r>
-            <a:endParaRPr lang="en-US" sz="1400" dirty="0"/>
-          </a:p>
-        </p:txBody>
-      </p:sp>
-      <p:sp>
-        <p:nvSpPr>
-          <p:cNvPr id="10" name="Shape 7"/>
+              <a:t>联网</a:t>
+            </a:r>
+            <a:endParaRPr lang="en-US" sz="1700" dirty="0"/>
+          </a:p>
+        </p:txBody>
+      </p:sp>
+      <p:sp>
+        <p:nvSpPr>
+          <p:cNvPr id="11" name="Shape 7"/>
           <p:cNvSpPr/>
           <p:nvPr/>
         </p:nvSpPr>
         <p:spPr>
           <a:xfrm>
-            <a:off x="1033272" y="2724912"/>
-            <a:ext cx="5212080" cy="0"/>
+            <a:off x="5852160" y="3456432"/>
+            <a:ext cx="5577840" cy="0"/>
           </a:xfrm>
           <a:prstGeom prst="line">
             <a:avLst/>
@@ -9016,14 +9059,14 @@
       </p:sp>
       <p:sp>
         <p:nvSpPr>
-          <p:cNvPr id="11" name="Text 8"/>
-          <p:cNvSpPr txBox="1"/>
-          <p:nvPr/>
-        </p:nvSpPr>
-        <p:spPr>
-          <a:xfrm>
-            <a:off x="1033272" y="2724912"/>
-            <a:ext cx="1280160" cy="438912"/>
+          <p:cNvPr id="12" name="Text 8"/>
+          <p:cNvSpPr txBox="1"/>
+          <p:nvPr/>
+        </p:nvSpPr>
+        <p:spPr>
+          <a:xfrm>
+            <a:off x="5852160" y="3456432"/>
+            <a:ext cx="3291840" cy="438912"/>
           </a:xfrm>
           <a:prstGeom prst="rect">
             <a:avLst/>
@@ -9042,27 +9085,27 @@
               <a:buNone/>
             </a:pPr>
             <a:r>
-              <a:rPr lang="en-US" sz="1400" dirty="0">
+              <a:rPr lang="en-US" sz="1700" dirty="0">
                 <a:solidFill>
                   <a:schemeClr val="accent6"/>
                 </a:solidFill>
               </a:rPr>
-              <a:t>当前工况</a:t>
-            </a:r>
-            <a:endParaRPr lang="en-US" sz="1400" dirty="0"/>
-          </a:p>
-        </p:txBody>
-      </p:sp>
-      <p:sp>
-        <p:nvSpPr>
-          <p:cNvPr id="12" name="Text 9"/>
-          <p:cNvSpPr txBox="1"/>
-          <p:nvPr/>
-        </p:nvSpPr>
-        <p:spPr>
-          <a:xfrm>
-            <a:off x="2313432" y="2724912"/>
-            <a:ext cx="3931920" cy="438912"/>
+              <a:t>本地 Ollama</a:t>
+            </a:r>
+            <a:endParaRPr lang="en-US" sz="1700" dirty="0"/>
+          </a:p>
+        </p:txBody>
+      </p:sp>
+      <p:sp>
+        <p:nvSpPr>
+          <p:cNvPr id="13" name="Text 9"/>
+          <p:cNvSpPr txBox="1"/>
+          <p:nvPr/>
+        </p:nvSpPr>
+        <p:spPr>
+          <a:xfrm>
+            <a:off x="9144000" y="3456432"/>
+            <a:ext cx="2286000" cy="438912"/>
           </a:xfrm>
           <a:prstGeom prst="rect">
             <a:avLst/>
@@ -9081,27 +9124,27 @@
               <a:buNone/>
             </a:pPr>
             <a:r>
-              <a:rPr lang="en-US" sz="1400" dirty="0">
+              <a:rPr lang="en-US" sz="1700" dirty="0">
                 <a:solidFill>
                   <a:schemeClr val="tx1"/>
                 </a:solidFill>
               </a:rPr>
-              <a:t>加热中（沸腾 / 高温阶段）</a:t>
-            </a:r>
-            <a:endParaRPr lang="en-US" sz="1400" dirty="0"/>
-          </a:p>
-        </p:txBody>
-      </p:sp>
-      <p:sp>
-        <p:nvSpPr>
-          <p:cNvPr id="13" name="Shape 10"/>
+              <a:t>局域网</a:t>
+            </a:r>
+            <a:endParaRPr lang="en-US" sz="1700" dirty="0"/>
+          </a:p>
+        </p:txBody>
+      </p:sp>
+      <p:sp>
+        <p:nvSpPr>
+          <p:cNvPr id="14" name="Shape 10"/>
           <p:cNvSpPr/>
           <p:nvPr/>
         </p:nvSpPr>
         <p:spPr>
           <a:xfrm>
-            <a:off x="1033272" y="3163824"/>
-            <a:ext cx="5212080" cy="0"/>
+            <a:off x="5852160" y="3895344"/>
+            <a:ext cx="5577840" cy="0"/>
           </a:xfrm>
           <a:prstGeom prst="line">
             <a:avLst/>
@@ -9117,14 +9160,14 @@
       </p:sp>
       <p:sp>
         <p:nvSpPr>
-          <p:cNvPr id="14" name="Text 11"/>
-          <p:cNvSpPr txBox="1"/>
-          <p:nvPr/>
-        </p:nvSpPr>
-        <p:spPr>
-          <a:xfrm>
-            <a:off x="1033272" y="3163824"/>
-            <a:ext cx="1280160" cy="438912"/>
+          <p:cNvPr id="15" name="Text 11"/>
+          <p:cNvSpPr txBox="1"/>
+          <p:nvPr/>
+        </p:nvSpPr>
+        <p:spPr>
+          <a:xfrm>
+            <a:off x="5852160" y="3895344"/>
+            <a:ext cx="3291840" cy="438912"/>
           </a:xfrm>
           <a:prstGeom prst="rect">
             <a:avLst/>
@@ -9143,292 +9186,12 @@
               <a:buNone/>
             </a:pPr>
             <a:r>
-              <a:rPr lang="en-US" sz="1400" dirty="0">
+              <a:rPr lang="en-US" sz="1700" dirty="0">
                 <a:solidFill>
                   <a:schemeClr val="accent6"/>
                 </a:solidFill>
               </a:rPr>
-              <a:t>主要依据</a:t>
-            </a:r>
-            <a:endParaRPr lang="en-US" sz="1400" dirty="0"/>
-          </a:p>
-        </p:txBody>
-      </p:sp>
-      <p:sp>
-        <p:nvSpPr>
-          <p:cNvPr id="15" name="Text 12"/>
-          <p:cNvSpPr txBox="1"/>
-          <p:nvPr/>
-        </p:nvSpPr>
-        <p:spPr>
-          <a:xfrm>
-            <a:off x="2313432" y="3163824"/>
-            <a:ext cx="3931920" cy="438912"/>
-          </a:xfrm>
-          <a:prstGeom prst="rect">
-            <a:avLst/>
-          </a:prstGeom>
-          <a:noFill/>
-          <a:ln/>
-        </p:spPr>
-        <p:txBody>
-          <a:bodyPr wrap="square" lIns="0" tIns="0" rIns="0" bIns="0" rtlCol="0" anchor="ctr"/>
-          <a:lstStyle/>
-          <a:p>
-            <a:pPr indent="0" marL="0">
-              <a:spcAft>
-                <a:spcPts val="400"/>
-              </a:spcAft>
-              <a:buNone/>
-            </a:pPr>
-            <a:r>
-              <a:rPr lang="en-US" sz="1400" dirty="0">
-                <a:solidFill>
-                  <a:schemeClr val="tx1"/>
-                </a:solidFill>
-              </a:rPr>
-              <a:t>越过沸点仍在升温；干烧风险分 0.70</a:t>
-            </a:r>
-            <a:endParaRPr lang="en-US" sz="1400" dirty="0"/>
-          </a:p>
-        </p:txBody>
-      </p:sp>
-      <p:sp>
-        <p:nvSpPr>
-          <p:cNvPr id="16" name="Shape 13"/>
-          <p:cNvSpPr/>
-          <p:nvPr/>
-        </p:nvSpPr>
-        <p:spPr>
-          <a:xfrm>
-            <a:off x="1033272" y="3602736"/>
-            <a:ext cx="5212080" cy="0"/>
-          </a:xfrm>
-          <a:prstGeom prst="line">
-            <a:avLst/>
-          </a:prstGeom>
-          <a:noFill/>
-          <a:ln w="9525">
-            <a:solidFill>
-              <a:srgbClr val="DDE0EA"/>
-            </a:solidFill>
-            <a:prstDash val="solid"/>
-          </a:ln>
-        </p:spPr>
-      </p:sp>
-      <p:sp>
-        <p:nvSpPr>
-          <p:cNvPr id="17" name="Text 14"/>
-          <p:cNvSpPr txBox="1"/>
-          <p:nvPr/>
-        </p:nvSpPr>
-        <p:spPr>
-          <a:xfrm>
-            <a:off x="1033272" y="3602736"/>
-            <a:ext cx="1280160" cy="438912"/>
-          </a:xfrm>
-          <a:prstGeom prst="rect">
-            <a:avLst/>
-          </a:prstGeom>
-          <a:noFill/>
-          <a:ln/>
-        </p:spPr>
-        <p:txBody>
-          <a:bodyPr wrap="square" lIns="0" tIns="0" rIns="0" bIns="0" rtlCol="0" anchor="ctr"/>
-          <a:lstStyle/>
-          <a:p>
-            <a:pPr indent="0" marL="0">
-              <a:spcAft>
-                <a:spcPts val="400"/>
-              </a:spcAft>
-              <a:buNone/>
-            </a:pPr>
-            <a:r>
-              <a:rPr lang="en-US" sz="1400" dirty="0">
-                <a:solidFill>
-                  <a:schemeClr val="accent6"/>
-                </a:solidFill>
-              </a:rPr>
-              <a:t>处置步骤</a:t>
-            </a:r>
-            <a:endParaRPr lang="en-US" sz="1400" dirty="0"/>
-          </a:p>
-        </p:txBody>
-      </p:sp>
-      <p:sp>
-        <p:nvSpPr>
-          <p:cNvPr id="18" name="Text 15"/>
-          <p:cNvSpPr txBox="1"/>
-          <p:nvPr/>
-        </p:nvSpPr>
-        <p:spPr>
-          <a:xfrm>
-            <a:off x="2313432" y="3602736"/>
-            <a:ext cx="3931920" cy="438912"/>
-          </a:xfrm>
-          <a:prstGeom prst="rect">
-            <a:avLst/>
-          </a:prstGeom>
-          <a:noFill/>
-          <a:ln/>
-        </p:spPr>
-        <p:txBody>
-          <a:bodyPr wrap="square" lIns="0" tIns="0" rIns="0" bIns="0" rtlCol="0" anchor="ctr"/>
-          <a:lstStyle/>
-          <a:p>
-            <a:pPr indent="0" marL="0">
-              <a:spcAft>
-                <a:spcPts val="400"/>
-              </a:spcAft>
-              <a:buNone/>
-            </a:pPr>
-            <a:r>
-              <a:rPr lang="en-US" sz="1400" dirty="0">
-                <a:solidFill>
-                  <a:schemeClr val="tx1"/>
-                </a:solidFill>
-              </a:rPr>
-              <a:t>1. 立即降低火力或补充液体；2. 回到实验台查看液面</a:t>
-            </a:r>
-            <a:endParaRPr lang="en-US" sz="1400" dirty="0"/>
-          </a:p>
-        </p:txBody>
-      </p:sp>
-      <p:sp>
-        <p:nvSpPr>
-          <p:cNvPr id="19" name="Shape 16"/>
-          <p:cNvSpPr/>
-          <p:nvPr/>
-        </p:nvSpPr>
-        <p:spPr>
-          <a:xfrm>
-            <a:off x="1033272" y="4041648"/>
-            <a:ext cx="5212080" cy="0"/>
-          </a:xfrm>
-          <a:prstGeom prst="line">
-            <a:avLst/>
-          </a:prstGeom>
-          <a:noFill/>
-          <a:ln w="9525">
-            <a:solidFill>
-              <a:srgbClr val="DDE0EA"/>
-            </a:solidFill>
-            <a:prstDash val="solid"/>
-          </a:ln>
-        </p:spPr>
-      </p:sp>
-      <p:sp>
-        <p:nvSpPr>
-          <p:cNvPr id="20" name="Text 17"/>
-          <p:cNvSpPr txBox="1"/>
-          <p:nvPr/>
-        </p:nvSpPr>
-        <p:spPr>
-          <a:xfrm>
-            <a:off x="1033272" y="4041648"/>
-            <a:ext cx="1280160" cy="438912"/>
-          </a:xfrm>
-          <a:prstGeom prst="rect">
-            <a:avLst/>
-          </a:prstGeom>
-          <a:noFill/>
-          <a:ln/>
-        </p:spPr>
-        <p:txBody>
-          <a:bodyPr wrap="square" lIns="0" tIns="0" rIns="0" bIns="0" rtlCol="0" anchor="ctr"/>
-          <a:lstStyle/>
-          <a:p>
-            <a:pPr indent="0" marL="0">
-              <a:spcAft>
-                <a:spcPts val="400"/>
-              </a:spcAft>
-              <a:buNone/>
-            </a:pPr>
-            <a:r>
-              <a:rPr lang="en-US" sz="1400" dirty="0">
-                <a:solidFill>
-                  <a:schemeClr val="accent6"/>
-                </a:solidFill>
-              </a:rPr>
-              <a:t>手册条款</a:t>
-            </a:r>
-            <a:endParaRPr lang="en-US" sz="1400" dirty="0"/>
-          </a:p>
-        </p:txBody>
-      </p:sp>
-      <p:sp>
-        <p:nvSpPr>
-          <p:cNvPr id="21" name="Text 18"/>
-          <p:cNvSpPr txBox="1"/>
-          <p:nvPr/>
-        </p:nvSpPr>
-        <p:spPr>
-          <a:xfrm>
-            <a:off x="2313432" y="4041648"/>
-            <a:ext cx="3931920" cy="438912"/>
-          </a:xfrm>
-          <a:prstGeom prst="rect">
-            <a:avLst/>
-          </a:prstGeom>
-          <a:noFill/>
-          <a:ln/>
-        </p:spPr>
-        <p:txBody>
-          <a:bodyPr wrap="square" lIns="0" tIns="0" rIns="0" bIns="0" rtlCol="0" anchor="ctr"/>
-          <a:lstStyle/>
-          <a:p>
-            <a:pPr indent="0" marL="0">
-              <a:spcAft>
-                <a:spcPts val="400"/>
-              </a:spcAft>
-              <a:buNone/>
-            </a:pPr>
-            <a:r>
-              <a:rPr lang="en-US" sz="1400" dirty="0">
-                <a:solidFill>
-                  <a:schemeClr val="tx1"/>
-                </a:solidFill>
-              </a:rPr>
-              <a:t>《实验室安全手册》1.3 沸腾阶段的注意事项</a:t>
-            </a:r>
-            <a:endParaRPr lang="en-US" sz="1400" dirty="0"/>
-          </a:p>
-        </p:txBody>
-      </p:sp>
-      <p:sp>
-        <p:nvSpPr>
-          <p:cNvPr id="22" name="Text 19"/>
-          <p:cNvSpPr txBox="1"/>
-          <p:nvPr/>
-        </p:nvSpPr>
-        <p:spPr>
-          <a:xfrm>
-            <a:off x="6949440" y="1508760"/>
-            <a:ext cx="4480560" cy="1463040"/>
-          </a:xfrm>
-          <a:prstGeom prst="rect">
-            <a:avLst/>
-          </a:prstGeom>
-          <a:noFill/>
-          <a:ln/>
-        </p:spPr>
-        <p:txBody>
-          <a:bodyPr wrap="square" lIns="0" tIns="0" rIns="0" bIns="0" rtlCol="0" anchor="t"/>
-          <a:lstStyle/>
-          <a:p>
-            <a:pPr indent="0" marL="0">
-              <a:spcAft>
-                <a:spcPts val="400"/>
-              </a:spcAft>
-              <a:buNone/>
-            </a:pPr>
-            <a:r>
-              <a:rPr lang="en-US" sz="1700" dirty="0">
-                <a:solidFill>
-                  <a:schemeClr val="tx2"/>
-                </a:solidFill>
-              </a:rPr>
-              <a:t>读取交叉验证结果和安全手册（BM25 检索），生成原因、步骤和条款引用。工具表只有 4 个只读工具，没有任何电源控制接口。</a:t>
+              <a:t>规则模板</a:t>
             </a:r>
             <a:endParaRPr lang="en-US" sz="1700" dirty="0"/>
           </a:p>
@@ -9436,255 +9199,14 @@
       </p:sp>
       <p:sp>
         <p:nvSpPr>
-          <p:cNvPr id="23" name="Text 20"/>
-          <p:cNvSpPr txBox="1"/>
-          <p:nvPr/>
-        </p:nvSpPr>
-        <p:spPr>
-          <a:xfrm>
-            <a:off x="6949440" y="3200400"/>
-            <a:ext cx="2377440" cy="438912"/>
-          </a:xfrm>
-          <a:prstGeom prst="rect">
-            <a:avLst/>
-          </a:prstGeom>
-          <a:noFill/>
-          <a:ln/>
-        </p:spPr>
-        <p:txBody>
-          <a:bodyPr wrap="square" lIns="0" tIns="0" rIns="0" bIns="0" rtlCol="0" anchor="ctr"/>
-          <a:lstStyle/>
-          <a:p>
-            <a:pPr indent="0" marL="0">
-              <a:spcAft>
-                <a:spcPts val="400"/>
-              </a:spcAft>
-              <a:buNone/>
-            </a:pPr>
-            <a:r>
-              <a:rPr lang="en-US" sz="1700" dirty="0">
-                <a:solidFill>
-                  <a:schemeClr val="accent6"/>
-                </a:solidFill>
-              </a:rPr>
-              <a:t>远程通义千问</a:t>
-            </a:r>
-            <a:endParaRPr lang="en-US" sz="1700" dirty="0"/>
-          </a:p>
-        </p:txBody>
-      </p:sp>
-      <p:sp>
-        <p:nvSpPr>
-          <p:cNvPr id="24" name="Text 21"/>
-          <p:cNvSpPr txBox="1"/>
-          <p:nvPr/>
-        </p:nvSpPr>
-        <p:spPr>
-          <a:xfrm>
-            <a:off x="9326880" y="3200400"/>
-            <a:ext cx="2103120" cy="438912"/>
-          </a:xfrm>
-          <a:prstGeom prst="rect">
-            <a:avLst/>
-          </a:prstGeom>
-          <a:noFill/>
-          <a:ln/>
-        </p:spPr>
-        <p:txBody>
-          <a:bodyPr wrap="square" lIns="0" tIns="0" rIns="0" bIns="0" rtlCol="0" anchor="ctr"/>
-          <a:lstStyle/>
-          <a:p>
-            <a:pPr indent="0" marL="0">
-              <a:spcAft>
-                <a:spcPts val="400"/>
-              </a:spcAft>
-              <a:buNone/>
-            </a:pPr>
-            <a:r>
-              <a:rPr lang="en-US" sz="1700" dirty="0">
-                <a:solidFill>
-                  <a:schemeClr val="tx1"/>
-                </a:solidFill>
-              </a:rPr>
-              <a:t>联网</a:t>
-            </a:r>
-            <a:endParaRPr lang="en-US" sz="1700" dirty="0"/>
-          </a:p>
-        </p:txBody>
-      </p:sp>
-      <p:sp>
-        <p:nvSpPr>
-          <p:cNvPr id="25" name="Shape 22"/>
-          <p:cNvSpPr/>
-          <p:nvPr/>
-        </p:nvSpPr>
-        <p:spPr>
-          <a:xfrm>
-            <a:off x="6949440" y="3639312"/>
-            <a:ext cx="4480560" cy="0"/>
-          </a:xfrm>
-          <a:prstGeom prst="line">
-            <a:avLst/>
-          </a:prstGeom>
-          <a:noFill/>
-          <a:ln w="9525">
-            <a:solidFill>
-              <a:srgbClr val="DDE0EA"/>
-            </a:solidFill>
-            <a:prstDash val="solid"/>
-          </a:ln>
-        </p:spPr>
-      </p:sp>
-      <p:sp>
-        <p:nvSpPr>
-          <p:cNvPr id="26" name="Text 23"/>
-          <p:cNvSpPr txBox="1"/>
-          <p:nvPr/>
-        </p:nvSpPr>
-        <p:spPr>
-          <a:xfrm>
-            <a:off x="6949440" y="3639312"/>
-            <a:ext cx="2377440" cy="438912"/>
-          </a:xfrm>
-          <a:prstGeom prst="rect">
-            <a:avLst/>
-          </a:prstGeom>
-          <a:noFill/>
-          <a:ln/>
-        </p:spPr>
-        <p:txBody>
-          <a:bodyPr wrap="square" lIns="0" tIns="0" rIns="0" bIns="0" rtlCol="0" anchor="ctr"/>
-          <a:lstStyle/>
-          <a:p>
-            <a:pPr indent="0" marL="0">
-              <a:spcAft>
-                <a:spcPts val="400"/>
-              </a:spcAft>
-              <a:buNone/>
-            </a:pPr>
-            <a:r>
-              <a:rPr lang="en-US" sz="1700" dirty="0">
-                <a:solidFill>
-                  <a:schemeClr val="accent6"/>
-                </a:solidFill>
-              </a:rPr>
-              <a:t>本地 Ollama</a:t>
-            </a:r>
-            <a:endParaRPr lang="en-US" sz="1700" dirty="0"/>
-          </a:p>
-        </p:txBody>
-      </p:sp>
-      <p:sp>
-        <p:nvSpPr>
-          <p:cNvPr id="27" name="Text 24"/>
-          <p:cNvSpPr txBox="1"/>
-          <p:nvPr/>
-        </p:nvSpPr>
-        <p:spPr>
-          <a:xfrm>
-            <a:off x="9326880" y="3639312"/>
-            <a:ext cx="2103120" cy="438912"/>
-          </a:xfrm>
-          <a:prstGeom prst="rect">
-            <a:avLst/>
-          </a:prstGeom>
-          <a:noFill/>
-          <a:ln/>
-        </p:spPr>
-        <p:txBody>
-          <a:bodyPr wrap="square" lIns="0" tIns="0" rIns="0" bIns="0" rtlCol="0" anchor="ctr"/>
-          <a:lstStyle/>
-          <a:p>
-            <a:pPr indent="0" marL="0">
-              <a:spcAft>
-                <a:spcPts val="400"/>
-              </a:spcAft>
-              <a:buNone/>
-            </a:pPr>
-            <a:r>
-              <a:rPr lang="en-US" sz="1700" dirty="0">
-                <a:solidFill>
-                  <a:schemeClr val="tx1"/>
-                </a:solidFill>
-              </a:rPr>
-              <a:t>局域网</a:t>
-            </a:r>
-            <a:endParaRPr lang="en-US" sz="1700" dirty="0"/>
-          </a:p>
-        </p:txBody>
-      </p:sp>
-      <p:sp>
-        <p:nvSpPr>
-          <p:cNvPr id="28" name="Shape 25"/>
-          <p:cNvSpPr/>
-          <p:nvPr/>
-        </p:nvSpPr>
-        <p:spPr>
-          <a:xfrm>
-            <a:off x="6949440" y="4078224"/>
-            <a:ext cx="4480560" cy="0"/>
-          </a:xfrm>
-          <a:prstGeom prst="line">
-            <a:avLst/>
-          </a:prstGeom>
-          <a:noFill/>
-          <a:ln w="9525">
-            <a:solidFill>
-              <a:srgbClr val="DDE0EA"/>
-            </a:solidFill>
-            <a:prstDash val="solid"/>
-          </a:ln>
-        </p:spPr>
-      </p:sp>
-      <p:sp>
-        <p:nvSpPr>
-          <p:cNvPr id="29" name="Text 26"/>
-          <p:cNvSpPr txBox="1"/>
-          <p:nvPr/>
-        </p:nvSpPr>
-        <p:spPr>
-          <a:xfrm>
-            <a:off x="6949440" y="4078224"/>
-            <a:ext cx="2377440" cy="438912"/>
-          </a:xfrm>
-          <a:prstGeom prst="rect">
-            <a:avLst/>
-          </a:prstGeom>
-          <a:noFill/>
-          <a:ln/>
-        </p:spPr>
-        <p:txBody>
-          <a:bodyPr wrap="square" lIns="0" tIns="0" rIns="0" bIns="0" rtlCol="0" anchor="ctr"/>
-          <a:lstStyle/>
-          <a:p>
-            <a:pPr indent="0" marL="0">
-              <a:spcAft>
-                <a:spcPts val="400"/>
-              </a:spcAft>
-              <a:buNone/>
-            </a:pPr>
-            <a:r>
-              <a:rPr lang="en-US" sz="1700" dirty="0">
-                <a:solidFill>
-                  <a:schemeClr val="accent6"/>
-                </a:solidFill>
-              </a:rPr>
-              <a:t>规则模板</a:t>
-            </a:r>
-            <a:endParaRPr lang="en-US" sz="1700" dirty="0"/>
-          </a:p>
-        </p:txBody>
-      </p:sp>
-      <p:sp>
-        <p:nvSpPr>
-          <p:cNvPr id="30" name="Text 27"/>
-          <p:cNvSpPr txBox="1"/>
-          <p:nvPr/>
-        </p:nvSpPr>
-        <p:spPr>
-          <a:xfrm>
-            <a:off x="9326880" y="4078224"/>
-            <a:ext cx="2103120" cy="438912"/>
+          <p:cNvPr id="16" name="Text 12"/>
+          <p:cNvSpPr txBox="1"/>
+          <p:nvPr/>
+        </p:nvSpPr>
+        <p:spPr>
+          <a:xfrm>
+            <a:off x="9144000" y="3895344"/>
+            <a:ext cx="2286000" cy="438912"/>
           </a:xfrm>
           <a:prstGeom prst="rect">
             <a:avLst/>
@@ -9815,6 +9337,9 @@
                 <a:solidFill>
                   <a:schemeClr val="tx1"/>
                 </a:solidFill>
+                <a:latin typeface="思源宋体" pitchFamily="34" charset="0"/>
+                <a:ea typeface="思源宋体" pitchFamily="34" charset="-122"/>
+                <a:cs typeface="思源宋体" pitchFamily="34" charset="-120"/>
               </a:rPr>
               <a:t>最后一道防线：只断不通</a:t>
             </a:r>
@@ -10302,31 +9827,50 @@
                   <a:schemeClr val="accent6"/>
                 </a:solidFill>
               </a:rPr>
-              <a:t>控制盒回 ACK；0.25 s 未收到则重发，最多 3 次。真机实测 ACK 往返时延中位数 4.9 ms。</a:t>
+              <a:t>控制盒回 ACK；0.25 s 未收到则重发，最多发送 3 次。真机实测 ACK 往返时延中位数 4.9 ms。</a:t>
             </a:r>
             <a:endParaRPr lang="en-US" sz="1300" dirty="0"/>
           </a:p>
         </p:txBody>
       </p:sp>
-      <p:sp>
-        <p:nvSpPr>
-          <p:cNvPr id="18" name="Shape 15"/>
+      <p:pic>
+        <p:nvPicPr>
+          <p:cNvPr id="18" name="Image 0" descr="实机截图：小屏断电锁定页">    </p:cNvPr>
+          <p:cNvPicPr>
+            <a:picLocks noChangeAspect="1"/>
+          </p:cNvPicPr>
+          <p:nvPr/>
+        </p:nvPicPr>
+        <p:blipFill>
+          <a:blip r:embed="rId1"/>
+          <a:stretch>
+            <a:fillRect/>
+          </a:stretch>
+        </p:blipFill>
+        <p:spPr>
+          <a:xfrm>
+            <a:off x="1016000" y="3429000"/>
+            <a:ext cx="3108960" cy="1865376"/>
+          </a:xfrm>
+          <a:prstGeom prst="rect">
+            <a:avLst/>
+          </a:prstGeom>
+        </p:spPr>
+      </p:pic>
+      <p:sp>
+        <p:nvSpPr>
+          <p:cNvPr id="19" name="Shape 15"/>
           <p:cNvSpPr/>
           <p:nvPr/>
         </p:nvSpPr>
         <p:spPr>
           <a:xfrm>
-            <a:off x="1016000" y="3556000"/>
-            <a:ext cx="3048000" cy="2095500"/>
-          </a:xfrm>
-          <a:prstGeom prst="roundRect">
-            <a:avLst>
-              <a:gd name="adj" fmla="val 9600"/>
-            </a:avLst>
-          </a:prstGeom>
-          <a:solidFill>
-            <a:schemeClr val="bg1"/>
-          </a:solidFill>
+            <a:off x="1016000" y="3429000"/>
+            <a:ext cx="3108960" cy="1865376"/>
+          </a:xfrm>
+          <a:prstGeom prst="rect">
+            <a:avLst/>
+          </a:prstGeom>
           <a:ln w="9525">
             <a:solidFill>
               <a:srgbClr val="DDE0EA"/>
@@ -10337,80 +9881,59 @@
       </p:sp>
       <p:sp>
         <p:nvSpPr>
-          <p:cNvPr id="19" name="Shape 16"/>
+          <p:cNvPr id="20" name="Text 16"/>
+          <p:cNvSpPr txBox="1"/>
+          <p:nvPr/>
+        </p:nvSpPr>
+        <p:spPr>
+          <a:xfrm>
+            <a:off x="1016000" y="5367528"/>
+            <a:ext cx="3108960" cy="274320"/>
+          </a:xfrm>
+          <a:prstGeom prst="rect">
+            <a:avLst/>
+          </a:prstGeom>
+          <a:noFill/>
+          <a:ln/>
+        </p:spPr>
+        <p:txBody>
+          <a:bodyPr wrap="square" lIns="0" tIns="0" rIns="0" bIns="0" rtlCol="0" anchor="t"/>
+          <a:lstStyle/>
+          <a:p>
+            <a:pPr indent="0" marL="0">
+              <a:spcAft>
+                <a:spcPts val="400"/>
+              </a:spcAft>
+              <a:buNone/>
+            </a:pPr>
+            <a:r>
+              <a:rPr lang="en-US" sz="1100" dirty="0">
+                <a:solidFill>
+                  <a:schemeClr val="accent6"/>
+                </a:solidFill>
+              </a:rPr>
+              <a:t>实机截图：小屏断电锁定页</a:t>
+            </a:r>
+            <a:endParaRPr lang="en-US" sz="1100" dirty="0"/>
+          </a:p>
+        </p:txBody>
+      </p:sp>
+      <p:sp>
+        <p:nvSpPr>
+          <p:cNvPr id="21" name="加热电源指示"/>
           <p:cNvSpPr/>
           <p:nvPr/>
         </p:nvSpPr>
         <p:spPr>
           <a:xfrm>
-            <a:off x="1333500" y="3873500"/>
-            <a:ext cx="192024" cy="192024"/>
+            <a:off x="10122916" y="1804416"/>
+            <a:ext cx="201168" cy="201168"/>
           </a:xfrm>
           <a:prstGeom prst="ellipse">
             <a:avLst/>
           </a:prstGeom>
           <a:solidFill>
-            <a:srgbClr val="E3E6EF"/>
-          </a:solidFill>
-          <a:ln/>
-        </p:spPr>
-      </p:sp>
-      <p:sp>
-        <p:nvSpPr>
-          <p:cNvPr id="20" name="Shape 17"/>
-          <p:cNvSpPr/>
-          <p:nvPr/>
-        </p:nvSpPr>
-        <p:spPr>
-          <a:xfrm>
-            <a:off x="1653540" y="3873500"/>
-            <a:ext cx="192024" cy="192024"/>
-          </a:xfrm>
-          <a:prstGeom prst="ellipse">
-            <a:avLst/>
-          </a:prstGeom>
-          <a:solidFill>
-            <a:srgbClr val="E3E6EF"/>
-          </a:solidFill>
-          <a:ln/>
-        </p:spPr>
-      </p:sp>
-      <p:sp>
-        <p:nvSpPr>
-          <p:cNvPr id="21" name="Shape 18"/>
-          <p:cNvSpPr/>
-          <p:nvPr/>
-        </p:nvSpPr>
-        <p:spPr>
-          <a:xfrm>
-            <a:off x="1973580" y="3873500"/>
-            <a:ext cx="192024" cy="192024"/>
-          </a:xfrm>
-          <a:prstGeom prst="ellipse">
-            <a:avLst/>
-          </a:prstGeom>
-          <a:solidFill>
-            <a:srgbClr val="E3E6EF"/>
-          </a:solidFill>
-          <a:ln/>
-        </p:spPr>
-      </p:sp>
-      <p:sp>
-        <p:nvSpPr>
-          <p:cNvPr id="22" name="信号灯"/>
-          <p:cNvSpPr/>
-          <p:nvPr/>
-        </p:nvSpPr>
-        <p:spPr>
-          <a:xfrm>
-            <a:off x="1328166" y="3868166"/>
-            <a:ext cx="201168" cy="201168"/>
-          </a:xfrm>
-          <a:prstGeom prst="ellipse">
-            <a:avLst/>
-          </a:prstGeom>
-          <a:solidFill>
-            <a:schemeClr val="accent3"/>
+            <a:schemeClr val="accent6"/>
           </a:solidFill>
           <a:ln w="19050">
             <a:solidFill>
@@ -10420,7 +9943,7 @@
           </a:ln>
           <a:effectLst>
             <a:outerShdw sx="100000" sy="100000" kx="0" ky="0" algn="bl" rotWithShape="0" blurRad="177800" dist="50800" dir="5400000">
-              <a:srgbClr val="E03A32">
+              <a:srgbClr val="969DB8">
                 <a:alpha val="55000"/>
               </a:srgbClr>
             </a:outerShdw>
@@ -10429,110 +9952,7 @@
       </p:sp>
       <p:sp>
         <p:nvSpPr>
-          <p:cNvPr id="23" name="Shape 20"/>
-          <p:cNvSpPr/>
-          <p:nvPr/>
-        </p:nvSpPr>
-        <p:spPr>
-          <a:xfrm>
-            <a:off x="3124200" y="4711700"/>
-            <a:ext cx="584200" cy="584200"/>
-          </a:xfrm>
-          <a:prstGeom prst="ellipse">
-            <a:avLst/>
-          </a:prstGeom>
-          <a:solidFill>
-            <a:schemeClr val="bg1"/>
-          </a:solidFill>
-          <a:ln w="19050">
-            <a:solidFill>
-              <a:srgbClr val="DDE0EA"/>
-            </a:solidFill>
-            <a:prstDash val="solid"/>
-          </a:ln>
-        </p:spPr>
-      </p:sp>
-      <p:sp>
-        <p:nvSpPr>
-          <p:cNvPr id="24" name="Text 21"/>
-          <p:cNvSpPr txBox="1"/>
-          <p:nvPr/>
-        </p:nvSpPr>
-        <p:spPr>
-          <a:xfrm>
-            <a:off x="3124200" y="4711700"/>
-            <a:ext cx="584200" cy="584200"/>
-          </a:xfrm>
-          <a:prstGeom prst="rect">
-            <a:avLst/>
-          </a:prstGeom>
-          <a:noFill/>
-          <a:ln/>
-        </p:spPr>
-        <p:txBody>
-          <a:bodyPr wrap="square" lIns="0" tIns="0" rIns="0" bIns="0" rtlCol="0" anchor="ctr"/>
-          <a:lstStyle/>
-          <a:p>
-            <a:pPr algn="ctr" indent="0" marL="0">
-              <a:spcAft>
-                <a:spcPts val="400"/>
-              </a:spcAft>
-              <a:buNone/>
-            </a:pPr>
-            <a:r>
-              <a:rPr lang="en-US" sz="1000" dirty="0">
-                <a:solidFill>
-                  <a:schemeClr val="tx2"/>
-                </a:solidFill>
-              </a:rPr>
-              <a:t>长按 2 秒</a:t>
-            </a:r>
-            <a:endParaRPr lang="en-US" sz="1000" dirty="0"/>
-          </a:p>
-        </p:txBody>
-      </p:sp>
-      <p:sp>
-        <p:nvSpPr>
-          <p:cNvPr id="25" name="Text 22"/>
-          <p:cNvSpPr txBox="1"/>
-          <p:nvPr/>
-        </p:nvSpPr>
-        <p:spPr>
-          <a:xfrm>
-            <a:off x="1333500" y="5207000"/>
-            <a:ext cx="1371600" cy="274320"/>
-          </a:xfrm>
-          <a:prstGeom prst="rect">
-            <a:avLst/>
-          </a:prstGeom>
-          <a:noFill/>
-          <a:ln/>
-        </p:spPr>
-        <p:txBody>
-          <a:bodyPr wrap="square" lIns="0" tIns="0" rIns="0" bIns="0" rtlCol="0" anchor="t"/>
-          <a:lstStyle/>
-          <a:p>
-            <a:pPr indent="0" marL="0">
-              <a:spcAft>
-                <a:spcPts val="400"/>
-              </a:spcAft>
-              <a:buNone/>
-            </a:pPr>
-            <a:r>
-              <a:rPr lang="en-US" sz="1300" dirty="0">
-                <a:solidFill>
-                  <a:schemeClr val="accent6"/>
-                </a:solidFill>
-              </a:rPr>
-              <a:t>控制盒</a:t>
-            </a:r>
-            <a:endParaRPr lang="en-US" sz="1300" dirty="0"/>
-          </a:p>
-        </p:txBody>
-      </p:sp>
-      <p:sp>
-        <p:nvSpPr>
-          <p:cNvPr id="26" name="Shape 23"/>
+          <p:cNvPr id="22" name="Shape 18"/>
           <p:cNvSpPr/>
           <p:nvPr/>
         </p:nvSpPr>
@@ -10555,7 +9975,7 @@
       </p:sp>
       <p:sp>
         <p:nvSpPr>
-          <p:cNvPr id="27" name="Text 24"/>
+          <p:cNvPr id="23" name="Text 19"/>
           <p:cNvSpPr txBox="1"/>
           <p:nvPr/>
         </p:nvSpPr>
@@ -10594,7 +10014,7 @@
       </p:sp>
       <p:sp>
         <p:nvSpPr>
-          <p:cNvPr id="28" name="Text 25"/>
+          <p:cNvPr id="24" name="Text 20"/>
           <p:cNvSpPr txBox="1"/>
           <p:nvPr/>
         </p:nvSpPr>
@@ -10676,7 +10096,7 @@
       </p:sp>
       <p:sp>
         <p:nvSpPr>
-          <p:cNvPr id="29" name="Shape 26"/>
+          <p:cNvPr id="25" name="Shape 21"/>
           <p:cNvSpPr/>
           <p:nvPr/>
         </p:nvSpPr>
@@ -10699,7 +10119,7 @@
       </p:sp>
       <p:sp>
         <p:nvSpPr>
-          <p:cNvPr id="30" name="Text 27"/>
+          <p:cNvPr id="26" name="Text 22"/>
           <p:cNvSpPr txBox="1"/>
           <p:nvPr/>
         </p:nvSpPr>
@@ -10738,7 +10158,7 @@
       </p:sp>
       <p:sp>
         <p:nvSpPr>
-          <p:cNvPr id="31" name="Text 28"/>
+          <p:cNvPr id="27" name="Text 23"/>
           <p:cNvSpPr txBox="1"/>
           <p:nvPr/>
         </p:nvSpPr>
@@ -10812,7 +10232,7 @@
                   <a:schemeClr val="tx1"/>
                 </a:solidFill>
               </a:rPr>
-              <a:t>心跳中断 30 s 且仍在加热</a:t>
+              <a:t>心跳中断 30 s 且热源 &gt; 60℃</a:t>
             </a:r>
             <a:endParaRPr lang="en-US" sz="1600" dirty="0"/>
           </a:p>
@@ -10820,7 +10240,7 @@
       </p:sp>
       <p:sp>
         <p:nvSpPr>
-          <p:cNvPr id="32" name="Shape 29"/>
+          <p:cNvPr id="28" name="Shape 24"/>
           <p:cNvSpPr/>
           <p:nvPr/>
         </p:nvSpPr>
@@ -10843,7 +10263,7 @@
       </p:sp>
       <p:sp>
         <p:nvSpPr>
-          <p:cNvPr id="33" name="Text 30"/>
+          <p:cNvPr id="29" name="Text 25"/>
           <p:cNvSpPr txBox="1"/>
           <p:nvPr/>
         </p:nvSpPr>
@@ -10873,6 +10293,9 @@
                 <a:solidFill>
                   <a:schemeClr val="tx1"/>
                 </a:solidFill>
+                <a:latin typeface="思源宋体" pitchFamily="34" charset="0"/>
+                <a:ea typeface="思源宋体" pitchFamily="34" charset="-122"/>
+                <a:cs typeface="思源宋体" pitchFamily="34" charset="-120"/>
               </a:rPr>
               <a:t>恢复供电</a:t>
             </a:r>
@@ -10882,7 +10305,7 @@
       </p:sp>
       <p:sp>
         <p:nvSpPr>
-          <p:cNvPr id="34" name="Text 31"/>
+          <p:cNvPr id="30" name="Text 26"/>
           <p:cNvSpPr txBox="1"/>
           <p:nvPr/>
         </p:nvSpPr>
@@ -11020,6 +10443,9 @@
                 <a:solidFill>
                   <a:schemeClr val="tx1"/>
                 </a:solidFill>
+                <a:latin typeface="思源宋体" pitchFamily="34" charset="0"/>
+                <a:ea typeface="思源宋体" pitchFamily="34" charset="-122"/>
+                <a:cs typeface="思源宋体" pitchFamily="34" charset="-120"/>
               </a:rPr>
               <a:t>总后台：同一栋楼，三个视角</a:t>
             </a:r>
@@ -11086,6 +10512,9 @@
                 <a:solidFill>
                   <a:schemeClr val="tx1"/>
                 </a:solidFill>
+                <a:latin typeface="思源宋体" pitchFamily="34" charset="0"/>
+                <a:ea typeface="思源宋体" pitchFamily="34" charset="-122"/>
+                <a:cs typeface="思源宋体" pitchFamily="34" charset="-120"/>
               </a:rPr>
               <a:t>学生端视角</a:t>
             </a:r>
@@ -12401,6 +11830,9 @@
                 <a:solidFill>
                   <a:schemeClr val="tx1"/>
                 </a:solidFill>
+                <a:latin typeface="思源宋体" pitchFamily="34" charset="0"/>
+                <a:ea typeface="思源宋体" pitchFamily="34" charset="-122"/>
+                <a:cs typeface="思源宋体" pitchFamily="34" charset="-120"/>
               </a:rPr>
               <a:t>实验室视角</a:t>
             </a:r>
@@ -13722,6 +13154,9 @@
                 <a:solidFill>
                   <a:schemeClr val="tx1"/>
                 </a:solidFill>
+                <a:latin typeface="思源宋体" pitchFamily="34" charset="0"/>
+                <a:ea typeface="思源宋体" pitchFamily="34" charset="-122"/>
+                <a:cs typeface="思源宋体" pitchFamily="34" charset="-120"/>
               </a:rPr>
               <a:t>实验楼视角</a:t>
             </a:r>
@@ -15126,6 +14561,9 @@
                 <a:solidFill>
                   <a:schemeClr val="tx1"/>
                 </a:solidFill>
+                <a:latin typeface="思源宋体" pitchFamily="34" charset="0"/>
+                <a:ea typeface="思源宋体" pitchFamily="34" charset="-122"/>
+                <a:cs typeface="思源宋体" pitchFamily="34" charset="-120"/>
               </a:rPr>
               <a:t>一套后台，分层管理</a:t>
             </a:r>
@@ -15188,6 +14626,9 @@
                 <a:solidFill>
                   <a:schemeClr val="tx1"/>
                 </a:solidFill>
+                <a:latin typeface="思源宋体" pitchFamily="34" charset="0"/>
+                <a:ea typeface="思源宋体" pitchFamily="34" charset="-122"/>
+                <a:cs typeface="思源宋体" pitchFamily="34" charset="-120"/>
               </a:rPr>
               <a:t>账号与授权</a:t>
             </a:r>
@@ -15289,6 +14730,9 @@
                 <a:solidFill>
                   <a:schemeClr val="tx1"/>
                 </a:solidFill>
+                <a:latin typeface="思源宋体" pitchFamily="34" charset="0"/>
+                <a:ea typeface="思源宋体" pitchFamily="34" charset="-122"/>
+                <a:cs typeface="思源宋体" pitchFamily="34" charset="-120"/>
               </a:rPr>
               <a:t>阈值方案</a:t>
             </a:r>
@@ -15390,6 +14834,9 @@
                 <a:solidFill>
                   <a:schemeClr val="tx1"/>
                 </a:solidFill>
+                <a:latin typeface="思源宋体" pitchFamily="34" charset="0"/>
+                <a:ea typeface="思源宋体" pitchFamily="34" charset="-122"/>
+                <a:cs typeface="思源宋体" pitchFamily="34" charset="-120"/>
               </a:rPr>
               <a:t>语音包</a:t>
             </a:r>
@@ -15491,6 +14938,9 @@
                 <a:solidFill>
                   <a:schemeClr val="tx1"/>
                 </a:solidFill>
+                <a:latin typeface="思源宋体" pitchFamily="34" charset="0"/>
+                <a:ea typeface="思源宋体" pitchFamily="34" charset="-122"/>
+                <a:cs typeface="思源宋体" pitchFamily="34" charset="-120"/>
               </a:rPr>
               <a:t>复核与审计</a:t>
             </a:r>
@@ -15733,6 +15183,9 @@
                 <a:solidFill>
                   <a:schemeClr val="tx1"/>
                 </a:solidFill>
+                <a:latin typeface="思源宋体" pitchFamily="34" charset="0"/>
+                <a:ea typeface="思源宋体" pitchFamily="34" charset="-122"/>
+                <a:cs typeface="思源宋体" pitchFamily="34" charset="-120"/>
               </a:rPr>
               <a:t>系统组成：三个独立程序</a:t>
             </a:r>
@@ -15799,6 +15252,9 @@
                 <a:solidFill>
                   <a:schemeClr val="tx1"/>
                 </a:solidFill>
+                <a:latin typeface="思源宋体" pitchFamily="34" charset="0"/>
+                <a:ea typeface="思源宋体" pitchFamily="34" charset="-122"/>
+                <a:cs typeface="思源宋体" pitchFamily="34" charset="-120"/>
               </a:rPr>
               <a:t>控制盒</a:t>
             </a:r>
@@ -15834,17 +15290,14 @@
               <a:buNone/>
             </a:pPr>
             <a:r>
-              <a:rPr lang="en-US" sz="1000" dirty="0">
+              <a:rPr lang="en-US" sz="1100" dirty="0">
                 <a:solidFill>
                   <a:schemeClr val="accent6"/>
                 </a:solidFill>
-                <a:latin typeface="Consolas" pitchFamily="34" charset="0"/>
-                <a:ea typeface="Consolas" pitchFamily="34" charset="-122"/>
-                <a:cs typeface="Consolas" pitchFamily="34" charset="-120"/>
-              </a:rPr>
-              <a:t>ESP32-S3 · Arduino 固件</a:t>
-            </a:r>
-            <a:endParaRPr lang="en-US" sz="1000" dirty="0"/>
+              </a:rPr>
+              <a:t>ESP32-S3，Arduino 固件</a:t>
+            </a:r>
+            <a:endParaRPr lang="en-US" sz="1100" dirty="0"/>
           </a:p>
         </p:txBody>
       </p:sp>
@@ -16150,6 +15603,9 @@
                 <a:solidFill>
                   <a:schemeClr val="tx1"/>
                 </a:solidFill>
+                <a:latin typeface="思源宋体" pitchFamily="34" charset="0"/>
+                <a:ea typeface="思源宋体" pitchFamily="34" charset="-122"/>
+                <a:cs typeface="思源宋体" pitchFamily="34" charset="-120"/>
               </a:rPr>
               <a:t>实验台终端</a:t>
             </a:r>
@@ -16185,17 +15641,14 @@
               <a:buNone/>
             </a:pPr>
             <a:r>
-              <a:rPr lang="en-US" sz="1000" dirty="0">
+              <a:rPr lang="en-US" sz="1100" dirty="0">
                 <a:solidFill>
                   <a:schemeClr val="accent6"/>
                 </a:solidFill>
-                <a:latin typeface="Consolas" pitchFamily="34" charset="0"/>
-                <a:ea typeface="Consolas" pitchFamily="34" charset="-122"/>
-                <a:cs typeface="Consolas" pitchFamily="34" charset="-120"/>
-              </a:rPr>
-              <a:t>RK3588 · Python · run_app.py</a:t>
-            </a:r>
-            <a:endParaRPr lang="en-US" sz="1000" dirty="0"/>
+              </a:rPr>
+              <a:t>RK3588，Python，run_app.py</a:t>
+            </a:r>
+            <a:endParaRPr lang="en-US" sz="1100" dirty="0"/>
           </a:p>
         </p:txBody>
       </p:sp>
@@ -16813,6 +16266,9 @@
                 <a:solidFill>
                   <a:schemeClr val="tx1"/>
                 </a:solidFill>
+                <a:latin typeface="思源宋体" pitchFamily="34" charset="0"/>
+                <a:ea typeface="思源宋体" pitchFamily="34" charset="-122"/>
+                <a:cs typeface="思源宋体" pitchFamily="34" charset="-120"/>
               </a:rPr>
               <a:t>总后台</a:t>
             </a:r>
@@ -17532,6 +16988,9 @@
                 <a:solidFill>
                   <a:schemeClr val="tx1"/>
                 </a:solidFill>
+                <a:latin typeface="思源宋体" pitchFamily="34" charset="0"/>
+                <a:ea typeface="思源宋体" pitchFamily="34" charset="-122"/>
+                <a:cs typeface="思源宋体" pitchFamily="34" charset="-120"/>
               </a:rPr>
               <a:t>程序卡死也能断电：心跳由安全判断驱动</a:t>
             </a:r>
@@ -17590,9 +17049,9 @@
                 <a:solidFill>
                   <a:schemeClr val="bg1"/>
                 </a:solidFill>
-                <a:latin typeface="Microsoft YaHei" pitchFamily="34" charset="0"/>
-                <a:ea typeface="Microsoft YaHei" pitchFamily="34" charset="-122"/>
-                <a:cs typeface="Microsoft YaHei" pitchFamily="34" charset="-120"/>
+                <a:latin typeface="更纱黑体 SC" pitchFamily="34" charset="0"/>
+                <a:ea typeface="更纱黑体 SC" pitchFamily="34" charset="-122"/>
+                <a:cs typeface="更纱黑体 SC" pitchFamily="34" charset="-120"/>
               </a:rPr>
               <a:t>① R3 加热中无人值守  </a:t>
             </a:r>
@@ -17949,9 +17408,9 @@
                 <a:solidFill>
                   <a:schemeClr val="bg1"/>
                 </a:solidFill>
-                <a:latin typeface="Microsoft YaHei" pitchFamily="34" charset="0"/>
-                <a:ea typeface="Microsoft YaHei" pitchFamily="34" charset="-122"/>
-                <a:cs typeface="Microsoft YaHei" pitchFamily="34" charset="-120"/>
+                <a:latin typeface="更纱黑体 SC" pitchFamily="34" charset="0"/>
+                <a:ea typeface="更纱黑体 SC" pitchFamily="34" charset="-122"/>
+                <a:cs typeface="更纱黑体 SC" pitchFamily="34" charset="-120"/>
               </a:rPr>
               <a:t>② 只有判断跑完才喂心跳  </a:t>
             </a:r>
@@ -18286,11 +17745,11 @@
                 <a:solidFill>
                   <a:schemeClr val="bg1"/>
                 </a:solidFill>
-                <a:latin typeface="Microsoft YaHei" pitchFamily="34" charset="0"/>
-                <a:ea typeface="Microsoft YaHei" pitchFamily="34" charset="-122"/>
-                <a:cs typeface="Microsoft YaHei" pitchFamily="34" charset="-120"/>
-              </a:rPr>
-              <a:t>③ 控制盒：心跳中断 30 s 且仍在加热，本地断电  </a:t>
+                <a:latin typeface="更纱黑体 SC" pitchFamily="34" charset="0"/>
+                <a:ea typeface="更纱黑体 SC" pitchFamily="34" charset="-122"/>
+                <a:cs typeface="更纱黑体 SC" pitchFamily="34" charset="-120"/>
+              </a:rPr>
+              <a:t>③ 控制盒：心跳中断 30 s 且热源 &gt; 60℃，本地断电  </a:t>
             </a:r>
             <a:pPr indent="0" marL="0">
               <a:buNone/>
@@ -18587,6 +18046,9 @@
                 <a:solidFill>
                   <a:schemeClr val="tx1"/>
                 </a:solidFill>
+                <a:latin typeface="思源宋体" pitchFamily="34" charset="0"/>
+                <a:ea typeface="思源宋体" pitchFamily="34" charset="-122"/>
+                <a:cs typeface="思源宋体" pitchFamily="34" charset="-120"/>
               </a:rPr>
               <a:t>串口协议：定长帧头 + CRC16 + ACK 重发</a:t>
             </a:r>
@@ -19642,9 +19104,9 @@
                 <a:solidFill>
                   <a:schemeClr val="bg1"/>
                 </a:solidFill>
-                <a:latin typeface="Microsoft YaHei" pitchFamily="34" charset="0"/>
-                <a:ea typeface="Microsoft YaHei" pitchFamily="34" charset="-122"/>
-                <a:cs typeface="Microsoft YaHei" pitchFamily="34" charset="-120"/>
+                <a:latin typeface="更纱黑体 SC" pitchFamily="34" charset="0"/>
+                <a:ea typeface="更纱黑体 SC" pitchFamily="34" charset="-122"/>
+                <a:cs typeface="更纱黑体 SC" pitchFamily="34" charset="-120"/>
               </a:rPr>
               <a:t>帧构造与校验  </a:t>
             </a:r>
@@ -20399,7 +19861,7 @@
                   <a:schemeClr val="accent6"/>
                 </a:solidFill>
               </a:rPr>
-              <a:t>接收端按帧头重新同步，半个包头会保留到下一次读取；CRC 错误计数可在控制台查看。</a:t>
+              <a:t>接收端按帧头重新同步：长度非法或 CRC 错误的帧直接丢弃，不完整的帧留到下一次读取再拼接。</a:t>
             </a:r>
             <a:endParaRPr lang="en-US" sz="1200" dirty="0"/>
           </a:p>
@@ -20506,6 +19968,9 @@
                 <a:solidFill>
                   <a:schemeClr val="tx1"/>
                 </a:solidFill>
+                <a:latin typeface="思源宋体" pitchFamily="34" charset="0"/>
+                <a:ea typeface="思源宋体" pitchFamily="34" charset="-122"/>
+                <a:cs typeface="思源宋体" pitchFamily="34" charset="-120"/>
               </a:rPr>
               <a:t>分层上报的实现：同一份打分，三次过滤</a:t>
             </a:r>
@@ -20564,9 +20029,9 @@
                 <a:solidFill>
                   <a:schemeClr val="bg1"/>
                 </a:solidFill>
-                <a:latin typeface="Microsoft YaHei" pitchFamily="34" charset="0"/>
-                <a:ea typeface="Microsoft YaHei" pitchFamily="34" charset="-122"/>
-                <a:cs typeface="Microsoft YaHei" pitchFamily="34" charset="-120"/>
+                <a:latin typeface="更纱黑体 SC" pitchFamily="34" charset="0"/>
+                <a:ea typeface="更纱黑体 SC" pitchFamily="34" charset="-122"/>
+                <a:cs typeface="更纱黑体 SC" pitchFamily="34" charset="-120"/>
               </a:rPr>
               <a:t>tiers()  </a:t>
             </a:r>
@@ -21537,6 +21002,9 @@
                 <a:solidFill>
                   <a:schemeClr val="tx1"/>
                 </a:solidFill>
+                <a:latin typeface="思源宋体" pitchFamily="34" charset="0"/>
+                <a:ea typeface="思源宋体" pitchFamily="34" charset="-122"/>
+                <a:cs typeface="思源宋体" pitchFamily="34" charset="-120"/>
               </a:rPr>
               <a:t>监控只能事后回看</a:t>
             </a:r>
@@ -21960,6 +21428,9 @@
                 <a:solidFill>
                   <a:schemeClr val="tx1"/>
                 </a:solidFill>
+                <a:latin typeface="思源宋体" pitchFamily="34" charset="0"/>
+                <a:ea typeface="思源宋体" pitchFamily="34" charset="-122"/>
+                <a:cs typeface="思源宋体" pitchFamily="34" charset="-120"/>
               </a:rPr>
               <a:t>设计约束写进自动测试</a:t>
             </a:r>
@@ -22018,9 +21489,9 @@
                 <a:solidFill>
                   <a:schemeClr val="bg1"/>
                 </a:solidFill>
-                <a:latin typeface="Microsoft YaHei" pitchFamily="34" charset="0"/>
-                <a:ea typeface="Microsoft YaHei" pitchFamily="34" charset="-122"/>
-                <a:cs typeface="Microsoft YaHei" pitchFamily="34" charset="-120"/>
+                <a:latin typeface="更纱黑体 SC" pitchFamily="34" charset="0"/>
+                <a:ea typeface="更纱黑体 SC" pitchFamily="34" charset="-122"/>
+                <a:cs typeface="更纱黑体 SC" pitchFamily="34" charset="-120"/>
               </a:rPr>
               <a:t>只断不通、大模型不碰电闸  </a:t>
             </a:r>
@@ -22849,6 +22320,9 @@
                 <a:solidFill>
                   <a:schemeClr val="tx1"/>
                 </a:solidFill>
+                <a:latin typeface="思源宋体" pitchFamily="34" charset="0"/>
+                <a:ea typeface="思源宋体" pitchFamily="34" charset="-122"/>
+                <a:cs typeface="思源宋体" pitchFamily="34" charset="-120"/>
               </a:rPr>
               <a:t>实物运行</a:t>
             </a:r>
@@ -23226,6 +22700,9 @@
                 <a:solidFill>
                   <a:schemeClr val="tx1"/>
                 </a:solidFill>
+                <a:latin typeface="思源宋体" pitchFamily="34" charset="0"/>
+                <a:ea typeface="思源宋体" pitchFamily="34" charset="-122"/>
+                <a:cs typeface="思源宋体" pitchFamily="34" charset="-120"/>
               </a:rPr>
               <a:t>双摄识别</a:t>
             </a:r>
@@ -23338,6 +22815,9 @@
                 <a:solidFill>
                   <a:schemeClr val="tx1"/>
                 </a:solidFill>
+                <a:latin typeface="思源宋体" pitchFamily="34" charset="0"/>
+                <a:ea typeface="思源宋体" pitchFamily="34" charset="-122"/>
+                <a:cs typeface="思源宋体" pitchFamily="34" charset="-120"/>
               </a:rPr>
               <a:t>交叉验证</a:t>
             </a:r>
@@ -23450,6 +22930,9 @@
                 <a:solidFill>
                   <a:schemeClr val="tx1"/>
                 </a:solidFill>
+                <a:latin typeface="思源宋体" pitchFamily="34" charset="0"/>
+                <a:ea typeface="思源宋体" pitchFamily="34" charset="-122"/>
+                <a:cs typeface="思源宋体" pitchFamily="34" charset="-120"/>
               </a:rPr>
               <a:t>三层分级上报</a:t>
             </a:r>
@@ -23562,6 +23045,9 @@
                 <a:solidFill>
                   <a:schemeClr val="tx1"/>
                 </a:solidFill>
+                <a:latin typeface="思源宋体" pitchFamily="34" charset="0"/>
+                <a:ea typeface="思源宋体" pitchFamily="34" charset="-122"/>
+                <a:cs typeface="思源宋体" pitchFamily="34" charset="-120"/>
               </a:rPr>
               <a:t>语音提示</a:t>
             </a:r>
@@ -23674,6 +23160,9 @@
                 <a:solidFill>
                   <a:schemeClr val="tx1"/>
                 </a:solidFill>
+                <a:latin typeface="思源宋体" pitchFamily="34" charset="0"/>
+                <a:ea typeface="思源宋体" pitchFamily="34" charset="-122"/>
+                <a:cs typeface="思源宋体" pitchFamily="34" charset="-120"/>
               </a:rPr>
               <a:t>总后台</a:t>
             </a:r>
@@ -23786,6 +23275,9 @@
                 <a:solidFill>
                   <a:schemeClr val="tx1"/>
                 </a:solidFill>
+                <a:latin typeface="思源宋体" pitchFamily="34" charset="0"/>
+                <a:ea typeface="思源宋体" pitchFamily="34" charset="-122"/>
+                <a:cs typeface="思源宋体" pitchFamily="34" charset="-120"/>
               </a:rPr>
               <a:t>控制盒断电</a:t>
             </a:r>
@@ -23898,6 +23390,9 @@
                 <a:solidFill>
                   <a:schemeClr val="tx1"/>
                 </a:solidFill>
+                <a:latin typeface="思源宋体" pitchFamily="34" charset="0"/>
+                <a:ea typeface="思源宋体" pitchFamily="34" charset="-122"/>
+                <a:cs typeface="思源宋体" pitchFamily="34" charset="-120"/>
               </a:rPr>
               <a:t>安全助手</a:t>
             </a:r>
@@ -24010,6 +23505,9 @@
                 <a:solidFill>
                   <a:schemeClr val="tx1"/>
                 </a:solidFill>
+                <a:latin typeface="思源宋体" pitchFamily="34" charset="0"/>
+                <a:ea typeface="思源宋体" pitchFamily="34" charset="-122"/>
+                <a:cs typeface="思源宋体" pitchFamily="34" charset="-120"/>
               </a:rPr>
               <a:t>温度预测</a:t>
             </a:r>
@@ -24085,6 +23583,9 @@
                 <a:solidFill>
                   <a:schemeClr val="tx1"/>
                 </a:solidFill>
+                <a:latin typeface="思源宋体" pitchFamily="34" charset="0"/>
+                <a:ea typeface="思源宋体" pitchFamily="34" charset="-122"/>
+                <a:cs typeface="思源宋体" pitchFamily="34" charset="-120"/>
               </a:rPr>
               <a:t>防患于未然</a:t>
             </a:r>
@@ -24368,6 +23869,9 @@
                 <a:solidFill>
                   <a:schemeClr val="tx1"/>
                 </a:solidFill>
+                <a:latin typeface="思源宋体" pitchFamily="34" charset="0"/>
+                <a:ea typeface="思源宋体" pitchFamily="34" charset="-122"/>
+                <a:cs typeface="思源宋体" pitchFamily="34" charset="-120"/>
               </a:rPr>
               <a:t>看得到人，</a:t>
             </a:r>
@@ -24382,6 +23886,9 @@
                 <a:solidFill>
                   <a:schemeClr val="tx1"/>
                 </a:solidFill>
+                <a:latin typeface="思源宋体" pitchFamily="34" charset="0"/>
+                <a:ea typeface="思源宋体" pitchFamily="34" charset="-122"/>
+                <a:cs typeface="思源宋体" pitchFamily="34" charset="-120"/>
               </a:rPr>
               <a:t>看不清台面</a:t>
             </a:r>
@@ -24874,6 +24381,9 @@
                 <a:solidFill>
                   <a:schemeClr val="tx1"/>
                 </a:solidFill>
+                <a:latin typeface="思源宋体" pitchFamily="34" charset="0"/>
+                <a:ea typeface="思源宋体" pitchFamily="34" charset="-122"/>
+                <a:cs typeface="思源宋体" pitchFamily="34" charset="-120"/>
               </a:rPr>
               <a:t>防患于未然</a:t>
             </a:r>
@@ -25297,6 +24807,9 @@
                 <a:solidFill>
                   <a:schemeClr val="tx1"/>
                 </a:solidFill>
+                <a:latin typeface="思源宋体" pitchFamily="34" charset="0"/>
+                <a:ea typeface="思源宋体" pitchFamily="34" charset="-122"/>
+                <a:cs typeface="思源宋体" pitchFamily="34" charset="-120"/>
               </a:rPr>
               <a:t>两路摄像头分工：全景看人，台面看器皿</a:t>
             </a:r>
@@ -25363,6 +24876,9 @@
                 <a:solidFill>
                   <a:schemeClr val="tx1"/>
                 </a:solidFill>
+                <a:latin typeface="思源宋体" pitchFamily="34" charset="0"/>
+                <a:ea typeface="思源宋体" pitchFamily="34" charset="-122"/>
+                <a:cs typeface="思源宋体" pitchFamily="34" charset="-120"/>
               </a:rPr>
               <a:t>全景摄像头</a:t>
             </a:r>
@@ -25640,6 +25156,9 @@
                 <a:solidFill>
                   <a:schemeClr val="tx1"/>
                 </a:solidFill>
+                <a:latin typeface="思源宋体" pitchFamily="34" charset="0"/>
+                <a:ea typeface="思源宋体" pitchFamily="34" charset="-122"/>
+                <a:cs typeface="思源宋体" pitchFamily="34" charset="-120"/>
               </a:rPr>
               <a:t>台面摄像头</a:t>
             </a:r>
@@ -25968,7 +25487,7 @@
                   <a:schemeClr val="accent6"/>
                 </a:solidFill>
               </a:rPr>
-              <a:t>检测框标签为模型原始类别名。两个模型共享一套推理线程，按配置的帧率轮流推理。</a:t>
+              <a:t>检测框标签为模型原始类别名。两路画面成对读取，在同一个处理函数里依次送入两个模型。</a:t>
             </a:r>
             <a:endParaRPr lang="en-US" sz="1200" dirty="0"/>
           </a:p>
@@ -26107,6 +25626,9 @@
                 <a:solidFill>
                   <a:schemeClr val="tx1"/>
                 </a:solidFill>
+                <a:latin typeface="思源宋体" pitchFamily="34" charset="0"/>
+                <a:ea typeface="思源宋体" pitchFamily="34" charset="-122"/>
+                <a:cs typeface="思源宋体" pitchFamily="34" charset="-120"/>
               </a:rPr>
               <a:t>YOLO11n 微调，各约 2.59 M 参数</a:t>
             </a:r>
@@ -26173,6 +25695,9 @@
                 <a:solidFill>
                   <a:schemeClr val="tx1"/>
                 </a:solidFill>
+                <a:latin typeface="思源宋体" pitchFamily="34" charset="0"/>
+                <a:ea typeface="思源宋体" pitchFamily="34" charset="-122"/>
+                <a:cs typeface="思源宋体" pitchFamily="34" charset="-120"/>
               </a:rPr>
               <a:t>人员模型</a:t>
             </a:r>
@@ -26213,7 +25738,7 @@
                   <a:schemeClr val="accent6"/>
                 </a:solidFill>
               </a:rPr>
-              <a:t>全景摄像头，12 类，80 epoch</a:t>
+              <a:t>全景摄像头，12 类，训练 80 轮</a:t>
             </a:r>
             <a:endParaRPr lang="en-US" sz="1300" dirty="0"/>
           </a:p>
@@ -26551,7 +26076,7 @@
         </p:nvGraphicFramePr>
         <p:xfrm>
           <a:off x="1153160" y="3268980"/>
-          <a:ext cx="4678680" cy="2468880"/>
+          <a:ext cx="4678680" cy="2286000"/>
         </p:xfrm>
         <a:graphic xmlns:a="http://schemas.openxmlformats.org/drawingml/2006/main">
           <a:graphicData uri="http://schemas.openxmlformats.org/drawingml/2006/chart">
@@ -26561,7 +26086,46 @@
       </p:graphicFrame>
       <p:sp>
         <p:nvSpPr>
-          <p:cNvPr id="16" name="Shape 12"/>
+          <p:cNvPr id="16" name="Text 12"/>
+          <p:cNvSpPr txBox="1"/>
+          <p:nvPr/>
+        </p:nvSpPr>
+        <p:spPr>
+          <a:xfrm>
+            <a:off x="1235456" y="5600700"/>
+            <a:ext cx="3657600" cy="274320"/>
+          </a:xfrm>
+          <a:prstGeom prst="rect">
+            <a:avLst/>
+          </a:prstGeom>
+          <a:noFill/>
+          <a:ln/>
+        </p:spPr>
+        <p:txBody>
+          <a:bodyPr wrap="square" lIns="0" tIns="0" rIns="0" bIns="0" rtlCol="0" anchor="t"/>
+          <a:lstStyle/>
+          <a:p>
+            <a:pPr indent="0" marL="0">
+              <a:spcAft>
+                <a:spcPts val="400"/>
+              </a:spcAft>
+              <a:buNone/>
+            </a:pPr>
+            <a:r>
+              <a:rPr lang="en-US" sz="1200" dirty="0">
+                <a:solidFill>
+                  <a:schemeClr val="tx2"/>
+                </a:solidFill>
+              </a:rPr>
+              <a:t>best.pt：第 77 轮　mAP@0.5 89.0%</a:t>
+            </a:r>
+            <a:endParaRPr lang="en-US" sz="1200" dirty="0"/>
+          </a:p>
+        </p:txBody>
+      </p:sp>
+      <p:sp>
+        <p:nvSpPr>
+          <p:cNvPr id="17" name="Shape 13"/>
           <p:cNvSpPr/>
           <p:nvPr/>
         </p:nvSpPr>
@@ -26588,7 +26152,7 @@
       </p:sp>
       <p:sp>
         <p:nvSpPr>
-          <p:cNvPr id="17" name="Text 13"/>
+          <p:cNvPr id="18" name="Text 14"/>
           <p:cNvSpPr txBox="1"/>
           <p:nvPr/>
         </p:nvSpPr>
@@ -26618,6 +26182,9 @@
                 <a:solidFill>
                   <a:schemeClr val="tx1"/>
                 </a:solidFill>
+                <a:latin typeface="思源宋体" pitchFamily="34" charset="0"/>
+                <a:ea typeface="思源宋体" pitchFamily="34" charset="-122"/>
+                <a:cs typeface="思源宋体" pitchFamily="34" charset="-120"/>
               </a:rPr>
               <a:t>器皿模型</a:t>
             </a:r>
@@ -26627,7 +26194,7 @@
       </p:sp>
       <p:sp>
         <p:nvSpPr>
-          <p:cNvPr id="18" name="Text 14"/>
+          <p:cNvPr id="19" name="Text 15"/>
           <p:cNvSpPr txBox="1"/>
           <p:nvPr/>
         </p:nvSpPr>
@@ -26658,7 +26225,7 @@
                   <a:schemeClr val="accent6"/>
                 </a:solidFill>
               </a:rPr>
-              <a:t>台面摄像头，14 类，50 epoch</a:t>
+              <a:t>台面摄像头，14 类，训练 50 轮</a:t>
             </a:r>
             <a:endParaRPr lang="en-US" sz="1300" dirty="0"/>
           </a:p>
@@ -26666,7 +26233,7 @@
       </p:sp>
       <p:sp>
         <p:nvSpPr>
-          <p:cNvPr id="19" name="Text 15"/>
+          <p:cNvPr id="20" name="Text 16"/>
           <p:cNvSpPr txBox="1"/>
           <p:nvPr/>
         </p:nvSpPr>
@@ -26708,7 +26275,7 @@
       </p:sp>
       <p:sp>
         <p:nvSpPr>
-          <p:cNvPr id="20" name="Text 16"/>
+          <p:cNvPr id="21" name="Text 17"/>
           <p:cNvSpPr txBox="1"/>
           <p:nvPr/>
         </p:nvSpPr>
@@ -26747,7 +26314,7 @@
       </p:sp>
       <p:sp>
         <p:nvSpPr>
-          <p:cNvPr id="21" name="Text 17"/>
+          <p:cNvPr id="22" name="Text 18"/>
           <p:cNvSpPr txBox="1"/>
           <p:nvPr/>
         </p:nvSpPr>
@@ -26789,7 +26356,7 @@
       </p:sp>
       <p:sp>
         <p:nvSpPr>
-          <p:cNvPr id="22" name="Text 18"/>
+          <p:cNvPr id="23" name="Text 19"/>
           <p:cNvSpPr txBox="1"/>
           <p:nvPr/>
         </p:nvSpPr>
@@ -26828,7 +26395,7 @@
       </p:sp>
       <p:sp>
         <p:nvSpPr>
-          <p:cNvPr id="23" name="Text 19"/>
+          <p:cNvPr id="24" name="Text 20"/>
           <p:cNvSpPr txBox="1"/>
           <p:nvPr/>
         </p:nvSpPr>
@@ -26870,7 +26437,7 @@
       </p:sp>
       <p:sp>
         <p:nvSpPr>
-          <p:cNvPr id="24" name="Text 20"/>
+          <p:cNvPr id="25" name="Text 21"/>
           <p:cNvSpPr txBox="1"/>
           <p:nvPr/>
         </p:nvSpPr>
@@ -26909,7 +26476,7 @@
       </p:sp>
       <p:sp>
         <p:nvSpPr>
-          <p:cNvPr id="25" name="Text 21"/>
+          <p:cNvPr id="26" name="Text 22"/>
           <p:cNvSpPr txBox="1"/>
           <p:nvPr/>
         </p:nvSpPr>
@@ -26951,7 +26518,7 @@
       </p:sp>
       <p:sp>
         <p:nvSpPr>
-          <p:cNvPr id="26" name="Text 22"/>
+          <p:cNvPr id="27" name="Text 23"/>
           <p:cNvSpPr txBox="1"/>
           <p:nvPr/>
         </p:nvSpPr>
@@ -26990,13 +26557,13 @@
       </p:sp>
       <p:graphicFrame>
         <p:nvGraphicFramePr>
-          <p:cNvPr id="27" name="Chart 1" descr=""/>
+          <p:cNvPr id="28" name="Chart 1" descr=""/>
           <p:cNvGraphicFramePr/>
           <p:nvPr/>
         </p:nvGraphicFramePr>
         <p:xfrm>
           <a:off x="6360160" y="3268980"/>
-          <a:ext cx="4678680" cy="2468880"/>
+          <a:ext cx="4678680" cy="2286000"/>
         </p:xfrm>
         <a:graphic xmlns:a="http://schemas.openxmlformats.org/drawingml/2006/main">
           <a:graphicData uri="http://schemas.openxmlformats.org/drawingml/2006/chart">
@@ -27006,7 +26573,46 @@
       </p:graphicFrame>
       <p:sp>
         <p:nvSpPr>
-          <p:cNvPr id="28" name="Text 23"/>
+          <p:cNvPr id="29" name="Text 24"/>
+          <p:cNvSpPr txBox="1"/>
+          <p:nvPr/>
+        </p:nvSpPr>
+        <p:spPr>
+          <a:xfrm>
+            <a:off x="6442456" y="5600700"/>
+            <a:ext cx="3657600" cy="274320"/>
+          </a:xfrm>
+          <a:prstGeom prst="rect">
+            <a:avLst/>
+          </a:prstGeom>
+          <a:noFill/>
+          <a:ln/>
+        </p:spPr>
+        <p:txBody>
+          <a:bodyPr wrap="square" lIns="0" tIns="0" rIns="0" bIns="0" rtlCol="0" anchor="t"/>
+          <a:lstStyle/>
+          <a:p>
+            <a:pPr indent="0" marL="0">
+              <a:spcAft>
+                <a:spcPts val="400"/>
+              </a:spcAft>
+              <a:buNone/>
+            </a:pPr>
+            <a:r>
+              <a:rPr lang="en-US" sz="1200" dirty="0">
+                <a:solidFill>
+                  <a:schemeClr val="tx2"/>
+                </a:solidFill>
+              </a:rPr>
+              <a:t>best.pt：第 50 轮　mAP@0.5 89.3%</a:t>
+            </a:r>
+            <a:endParaRPr lang="en-US" sz="1200" dirty="0"/>
+          </a:p>
+        </p:txBody>
+      </p:sp>
+      <p:sp>
+        <p:nvSpPr>
+          <p:cNvPr id="30" name="Text 25"/>
           <p:cNvSpPr txBox="1"/>
           <p:nvPr/>
         </p:nvSpPr>
@@ -27037,7 +26643,7 @@
                   <a:schemeClr val="accent6"/>
                 </a:solidFill>
               </a:rPr>
-              <a:t>指标为训练结束时验证集上的目标检测指标，数据来自 models/model_card.json</a:t>
+              <a:t>指标为 best.pt 所在轮次（人员模型第 77 轮，器皿模型第 50 轮）的验证集检测指标，数据来自 models/model_card.json</a:t>
             </a:r>
             <a:endParaRPr lang="en-US" sz="1200" dirty="0"/>
           </a:p>
@@ -27045,7 +26651,7 @@
       </p:sp>
       <p:sp>
         <p:nvSpPr>
-          <p:cNvPr id="29" name="信号灯"/>
+          <p:cNvPr id="31" name="信号灯"/>
           <p:cNvSpPr/>
           <p:nvPr/>
         </p:nvSpPr>
@@ -27176,6 +26782,9 @@
                 <a:solidFill>
                   <a:schemeClr val="tx1"/>
                 </a:solidFill>
+                <a:latin typeface="思源宋体" pitchFamily="34" charset="0"/>
+                <a:ea typeface="思源宋体" pitchFamily="34" charset="-122"/>
+                <a:cs typeface="思源宋体" pitchFamily="34" charset="-120"/>
               </a:rPr>
               <a:t>从检测框到事件：时间窗口投票</a:t>
             </a:r>
@@ -27234,9 +26843,9 @@
                 <a:solidFill>
                   <a:schemeClr val="bg1"/>
                 </a:solidFill>
-                <a:latin typeface="Microsoft YaHei" pitchFamily="34" charset="0"/>
-                <a:ea typeface="Microsoft YaHei" pitchFamily="34" charset="-122"/>
-                <a:cs typeface="Microsoft YaHei" pitchFamily="34" charset="-120"/>
+                <a:latin typeface="更纱黑体 SC" pitchFamily="34" charset="0"/>
+                <a:ea typeface="更纱黑体 SC" pitchFamily="34" charset="-122"/>
+                <a:cs typeface="更纱黑体 SC" pitchFamily="34" charset="-120"/>
               </a:rPr>
               <a:t>TemporalVoter.update  </a:t>
             </a:r>
@@ -28336,6 +27945,9 @@
                 <a:solidFill>
                   <a:schemeClr val="tx1"/>
                 </a:solidFill>
+                <a:latin typeface="思源宋体" pitchFamily="34" charset="0"/>
+                <a:ea typeface="思源宋体" pitchFamily="34" charset="-122"/>
+                <a:cs typeface="思源宋体" pitchFamily="34" charset="-120"/>
               </a:rPr>
               <a:t>演示：吃苹果的同学</a:t>
             </a:r>
@@ -28514,6 +28126,9 @@
                 <a:solidFill>
                   <a:schemeClr val="tx1"/>
                 </a:solidFill>
+                <a:latin typeface="思源宋体" pitchFamily="34" charset="0"/>
+                <a:ea typeface="思源宋体" pitchFamily="34" charset="-122"/>
+                <a:cs typeface="思源宋体" pitchFamily="34" charset="-120"/>
               </a:rPr>
               <a:t>高危</a:t>
             </a:r>
@@ -28922,6 +28537,9 @@
                 <a:solidFill>
                   <a:schemeClr val="tx1"/>
                 </a:solidFill>
+                <a:latin typeface="思源宋体" pitchFamily="34" charset="0"/>
+                <a:ea typeface="思源宋体" pitchFamily="34" charset="-122"/>
+                <a:cs typeface="思源宋体" pitchFamily="34" charset="-120"/>
               </a:rPr>
               <a:t>未加热</a:t>
             </a:r>
@@ -29488,7 +29106,46 @@
       </p:sp>
       <p:sp>
         <p:nvSpPr>
-          <p:cNvPr id="38" name="Shape 35"/>
+          <p:cNvPr id="38" name="Text 35"/>
+          <p:cNvSpPr txBox="1"/>
+          <p:nvPr/>
+        </p:nvSpPr>
+        <p:spPr>
+          <a:xfrm>
+            <a:off x="1054100" y="5715000"/>
+            <a:ext cx="4572000" cy="274320"/>
+          </a:xfrm>
+          <a:prstGeom prst="rect">
+            <a:avLst/>
+          </a:prstGeom>
+          <a:noFill/>
+          <a:ln/>
+        </p:spPr>
+        <p:txBody>
+          <a:bodyPr wrap="square" lIns="0" tIns="0" rIns="0" bIns="0" rtlCol="0" anchor="t"/>
+          <a:lstStyle/>
+          <a:p>
+            <a:pPr indent="0" marL="0">
+              <a:spcAft>
+                <a:spcPts val="400"/>
+              </a:spcAft>
+              <a:buNone/>
+            </a:pPr>
+            <a:r>
+              <a:rPr lang="en-US" sz="1100" dirty="0">
+                <a:solidFill>
+                  <a:schemeClr val="accent6"/>
+                </a:solidFill>
+              </a:rPr>
+              <a:t>小屏界面示意，按当前小屏布局绘制</a:t>
+            </a:r>
+            <a:endParaRPr lang="en-US" sz="1100" dirty="0"/>
+          </a:p>
+        </p:txBody>
+      </p:sp>
+      <p:sp>
+        <p:nvSpPr>
+          <p:cNvPr id="39" name="Shape 36"/>
           <p:cNvSpPr/>
           <p:nvPr/>
         </p:nvSpPr>
@@ -29522,7 +29179,7 @@
       </p:sp>
       <p:sp>
         <p:nvSpPr>
-          <p:cNvPr id="39" name="Shape 36"/>
+          <p:cNvPr id="40" name="Shape 37"/>
           <p:cNvSpPr/>
           <p:nvPr/>
         </p:nvSpPr>
@@ -29546,7 +29203,7 @@
       </p:sp>
       <p:sp>
         <p:nvSpPr>
-          <p:cNvPr id="40" name="Shape 37"/>
+          <p:cNvPr id="41" name="Shape 38"/>
           <p:cNvSpPr/>
           <p:nvPr/>
         </p:nvSpPr>
@@ -29566,7 +29223,7 @@
       </p:sp>
       <p:sp>
         <p:nvSpPr>
-          <p:cNvPr id="41" name="Text 38"/>
+          <p:cNvPr id="42" name="Text 39"/>
           <p:cNvSpPr txBox="1"/>
           <p:nvPr/>
         </p:nvSpPr>
@@ -29605,7 +29262,7 @@
       </p:sp>
       <p:sp>
         <p:nvSpPr>
-          <p:cNvPr id="42" name="Text 39"/>
+          <p:cNvPr id="43" name="Text 40"/>
           <p:cNvSpPr txBox="1"/>
           <p:nvPr/>
         </p:nvSpPr>
@@ -29644,7 +29301,7 @@
       </p:sp>
       <p:sp>
         <p:nvSpPr>
-          <p:cNvPr id="43" name="Text 40"/>
+          <p:cNvPr id="44" name="Text 41"/>
           <p:cNvSpPr txBox="1"/>
           <p:nvPr/>
         </p:nvSpPr>
@@ -29683,7 +29340,7 @@
       </p:sp>
       <p:sp>
         <p:nvSpPr>
-          <p:cNvPr id="44" name="Shape 41"/>
+          <p:cNvPr id="45" name="Shape 42"/>
           <p:cNvSpPr/>
           <p:nvPr/>
         </p:nvSpPr>
@@ -29717,7 +29374,7 @@
       </p:sp>
       <p:sp>
         <p:nvSpPr>
-          <p:cNvPr id="45" name="Shape 42"/>
+          <p:cNvPr id="46" name="Shape 43"/>
           <p:cNvSpPr/>
           <p:nvPr/>
         </p:nvSpPr>
@@ -29741,7 +29398,7 @@
       </p:sp>
       <p:sp>
         <p:nvSpPr>
-          <p:cNvPr id="46" name="Shape 43"/>
+          <p:cNvPr id="47" name="Shape 44"/>
           <p:cNvSpPr/>
           <p:nvPr/>
         </p:nvSpPr>
@@ -29761,7 +29418,7 @@
       </p:sp>
       <p:sp>
         <p:nvSpPr>
-          <p:cNvPr id="47" name="Text 44"/>
+          <p:cNvPr id="48" name="Text 45"/>
           <p:cNvSpPr txBox="1"/>
           <p:nvPr/>
         </p:nvSpPr>
@@ -29800,7 +29457,7 @@
       </p:sp>
       <p:sp>
         <p:nvSpPr>
-          <p:cNvPr id="48" name="Text 45"/>
+          <p:cNvPr id="49" name="Text 46"/>
           <p:cNvSpPr txBox="1"/>
           <p:nvPr/>
         </p:nvSpPr>
@@ -29839,7 +29496,7 @@
       </p:sp>
       <p:sp>
         <p:nvSpPr>
-          <p:cNvPr id="49" name="Text 46"/>
+          <p:cNvPr id="50" name="Text 47"/>
           <p:cNvSpPr txBox="1"/>
           <p:nvPr/>
         </p:nvSpPr>
@@ -29977,6 +29634,9 @@
                 <a:solidFill>
                   <a:schemeClr val="tx1"/>
                 </a:solidFill>
+                <a:latin typeface="思源宋体" pitchFamily="34" charset="0"/>
+                <a:ea typeface="思源宋体" pitchFamily="34" charset="-122"/>
+                <a:cs typeface="思源宋体" pitchFamily="34" charset="-120"/>
               </a:rPr>
               <a:t>学生是第一用户</a:t>
             </a:r>
@@ -29993,7 +29653,7 @@
         <p:spPr>
           <a:xfrm>
             <a:off x="758952" y="1463040"/>
-            <a:ext cx="9601200" cy="914400"/>
+            <a:ext cx="6035040" cy="1371600"/>
           </a:xfrm>
           <a:prstGeom prst="rect">
             <a:avLst/>
@@ -30023,9 +29683,94 @@
           </a:p>
         </p:txBody>
       </p:sp>
-      <p:sp>
-        <p:nvSpPr>
-          <p:cNvPr id="5" name="信号灯"/>
+      <p:pic>
+        <p:nvPicPr>
+          <p:cNvPr id="5" name="Image 0" descr="实机截图：实验台小屏，加热中无人值守、预测即将干烧">    </p:cNvPr>
+          <p:cNvPicPr>
+            <a:picLocks noChangeAspect="1"/>
+          </p:cNvPicPr>
+          <p:nvPr/>
+        </p:nvPicPr>
+        <p:blipFill>
+          <a:blip r:embed="rId1"/>
+          <a:stretch>
+            <a:fillRect/>
+          </a:stretch>
+        </p:blipFill>
+        <p:spPr>
+          <a:xfrm>
+            <a:off x="7406640" y="1280160"/>
+            <a:ext cx="4023360" cy="2414016"/>
+          </a:xfrm>
+          <a:prstGeom prst="rect">
+            <a:avLst/>
+          </a:prstGeom>
+        </p:spPr>
+      </p:pic>
+      <p:sp>
+        <p:nvSpPr>
+          <p:cNvPr id="6" name="Shape 2"/>
+          <p:cNvSpPr/>
+          <p:nvPr/>
+        </p:nvSpPr>
+        <p:spPr>
+          <a:xfrm>
+            <a:off x="7406640" y="1280160"/>
+            <a:ext cx="4023360" cy="2414016"/>
+          </a:xfrm>
+          <a:prstGeom prst="rect">
+            <a:avLst/>
+          </a:prstGeom>
+          <a:ln w="9525">
+            <a:solidFill>
+              <a:srgbClr val="DDE0EA"/>
+            </a:solidFill>
+            <a:prstDash val="solid"/>
+          </a:ln>
+        </p:spPr>
+      </p:sp>
+      <p:sp>
+        <p:nvSpPr>
+          <p:cNvPr id="7" name="Text 3"/>
+          <p:cNvSpPr txBox="1"/>
+          <p:nvPr/>
+        </p:nvSpPr>
+        <p:spPr>
+          <a:xfrm>
+            <a:off x="7406640" y="3767328"/>
+            <a:ext cx="4023360" cy="274320"/>
+          </a:xfrm>
+          <a:prstGeom prst="rect">
+            <a:avLst/>
+          </a:prstGeom>
+          <a:noFill/>
+          <a:ln/>
+        </p:spPr>
+        <p:txBody>
+          <a:bodyPr wrap="square" lIns="0" tIns="0" rIns="0" bIns="0" rtlCol="0" anchor="t"/>
+          <a:lstStyle/>
+          <a:p>
+            <a:pPr indent="0" marL="0">
+              <a:spcAft>
+                <a:spcPts val="400"/>
+              </a:spcAft>
+              <a:buNone/>
+            </a:pPr>
+            <a:r>
+              <a:rPr lang="en-US" sz="1100" dirty="0">
+                <a:solidFill>
+                  <a:schemeClr val="accent6"/>
+                </a:solidFill>
+              </a:rPr>
+              <a:t>实机截图：实验台小屏，加热中无人值守、预测即将干烧</a:t>
+            </a:r>
+            <a:endParaRPr lang="en-US" sz="1100" dirty="0"/>
+          </a:p>
+        </p:txBody>
+      </p:sp>
+      <p:sp>
+        <p:nvSpPr>
+          <p:cNvPr id="8" name="信号灯"/>
           <p:cNvSpPr/>
           <p:nvPr/>
         </p:nvSpPr>
@@ -30057,13 +29802,13 @@
       </p:sp>
       <p:sp>
         <p:nvSpPr>
-          <p:cNvPr id="6" name="Shape 3"/>
+          <p:cNvPr id="9" name="Shape 5"/>
           <p:cNvSpPr/>
           <p:nvPr/>
         </p:nvSpPr>
         <p:spPr>
           <a:xfrm>
-            <a:off x="2095500" y="3937000"/>
+            <a:off x="2095500" y="4206240"/>
             <a:ext cx="2834640" cy="0"/>
           </a:xfrm>
           <a:prstGeom prst="line">
@@ -30080,13 +29825,13 @@
       </p:sp>
       <p:sp>
         <p:nvSpPr>
-          <p:cNvPr id="7" name="Text 4"/>
-          <p:cNvSpPr txBox="1"/>
-          <p:nvPr/>
-        </p:nvSpPr>
-        <p:spPr>
-          <a:xfrm>
-            <a:off x="2095500" y="4119880"/>
+          <p:cNvPr id="10" name="Text 6"/>
+          <p:cNvSpPr txBox="1"/>
+          <p:nvPr/>
+        </p:nvSpPr>
+        <p:spPr>
+          <a:xfrm>
+            <a:off x="2095500" y="4389120"/>
             <a:ext cx="2788920" cy="457200"/>
           </a:xfrm>
           <a:prstGeom prst="rect">
@@ -30110,6 +29855,9 @@
                 <a:solidFill>
                   <a:schemeClr val="tx1"/>
                 </a:solidFill>
+                <a:latin typeface="思源宋体" pitchFamily="34" charset="0"/>
+                <a:ea typeface="思源宋体" pitchFamily="34" charset="-122"/>
+                <a:cs typeface="思源宋体" pitchFamily="34" charset="-120"/>
               </a:rPr>
               <a:t>每张实验桌一台终端</a:t>
             </a:r>
@@ -30119,13 +29867,13 @@
       </p:sp>
       <p:sp>
         <p:nvSpPr>
-          <p:cNvPr id="8" name="Text 5"/>
-          <p:cNvSpPr txBox="1"/>
-          <p:nvPr/>
-        </p:nvSpPr>
-        <p:spPr>
-          <a:xfrm>
-            <a:off x="2095500" y="4622800"/>
+          <p:cNvPr id="11" name="Text 7"/>
+          <p:cNvSpPr txBox="1"/>
+          <p:nvPr/>
+        </p:nvSpPr>
+        <p:spPr>
+          <a:xfrm>
+            <a:off x="2095500" y="4892040"/>
             <a:ext cx="2788920" cy="1188720"/>
           </a:xfrm>
           <a:prstGeom prst="rect">
@@ -30158,13 +29906,13 @@
       </p:sp>
       <p:sp>
         <p:nvSpPr>
-          <p:cNvPr id="9" name="Shape 6"/>
+          <p:cNvPr id="12" name="Shape 8"/>
           <p:cNvSpPr/>
           <p:nvPr/>
         </p:nvSpPr>
         <p:spPr>
           <a:xfrm>
-            <a:off x="5113020" y="3937000"/>
+            <a:off x="5113020" y="4206240"/>
             <a:ext cx="2834640" cy="0"/>
           </a:xfrm>
           <a:prstGeom prst="line">
@@ -30181,13 +29929,13 @@
       </p:sp>
       <p:sp>
         <p:nvSpPr>
-          <p:cNvPr id="10" name="Text 7"/>
-          <p:cNvSpPr txBox="1"/>
-          <p:nvPr/>
-        </p:nvSpPr>
-        <p:spPr>
-          <a:xfrm>
-            <a:off x="5113020" y="4119880"/>
+          <p:cNvPr id="13" name="Text 9"/>
+          <p:cNvSpPr txBox="1"/>
+          <p:nvPr/>
+        </p:nvSpPr>
+        <p:spPr>
+          <a:xfrm>
+            <a:off x="5113020" y="4389120"/>
             <a:ext cx="2788920" cy="457200"/>
           </a:xfrm>
           <a:prstGeom prst="rect">
@@ -30211,6 +29959,9 @@
                 <a:solidFill>
                   <a:schemeClr val="tx1"/>
                 </a:solidFill>
+                <a:latin typeface="思源宋体" pitchFamily="34" charset="0"/>
+                <a:ea typeface="思源宋体" pitchFamily="34" charset="-122"/>
+                <a:cs typeface="思源宋体" pitchFamily="34" charset="-120"/>
               </a:rPr>
               <a:t>判断在本机完成</a:t>
             </a:r>
@@ -30220,13 +29971,13 @@
       </p:sp>
       <p:sp>
         <p:nvSpPr>
-          <p:cNvPr id="11" name="Text 8"/>
-          <p:cNvSpPr txBox="1"/>
-          <p:nvPr/>
-        </p:nvSpPr>
-        <p:spPr>
-          <a:xfrm>
-            <a:off x="5113020" y="4622800"/>
+          <p:cNvPr id="14" name="Text 10"/>
+          <p:cNvSpPr txBox="1"/>
+          <p:nvPr/>
+        </p:nvSpPr>
+        <p:spPr>
+          <a:xfrm>
+            <a:off x="5113020" y="4892040"/>
             <a:ext cx="2788920" cy="1188720"/>
           </a:xfrm>
           <a:prstGeom prst="rect">
@@ -30259,13 +30010,13 @@
       </p:sp>
       <p:sp>
         <p:nvSpPr>
-          <p:cNvPr id="12" name="Shape 9"/>
+          <p:cNvPr id="15" name="Shape 11"/>
           <p:cNvSpPr/>
           <p:nvPr/>
         </p:nvSpPr>
         <p:spPr>
           <a:xfrm>
-            <a:off x="8130540" y="3937000"/>
+            <a:off x="8130540" y="4206240"/>
             <a:ext cx="2834640" cy="0"/>
           </a:xfrm>
           <a:prstGeom prst="line">
@@ -30282,13 +30033,13 @@
       </p:sp>
       <p:sp>
         <p:nvSpPr>
-          <p:cNvPr id="13" name="Text 10"/>
-          <p:cNvSpPr txBox="1"/>
-          <p:nvPr/>
-        </p:nvSpPr>
-        <p:spPr>
-          <a:xfrm>
-            <a:off x="8130540" y="4119880"/>
+          <p:cNvPr id="16" name="Text 12"/>
+          <p:cNvSpPr txBox="1"/>
+          <p:nvPr/>
+        </p:nvSpPr>
+        <p:spPr>
+          <a:xfrm>
+            <a:off x="8130540" y="4389120"/>
             <a:ext cx="2788920" cy="457200"/>
           </a:xfrm>
           <a:prstGeom prst="rect">
@@ -30312,6 +30063,9 @@
                 <a:solidFill>
                   <a:schemeClr val="tx1"/>
                 </a:solidFill>
+                <a:latin typeface="思源宋体" pitchFamily="34" charset="0"/>
+                <a:ea typeface="思源宋体" pitchFamily="34" charset="-122"/>
+                <a:cs typeface="思源宋体" pitchFamily="34" charset="-120"/>
               </a:rPr>
               <a:t>小屏按现场设计</a:t>
             </a:r>
@@ -30321,13 +30075,13 @@
       </p:sp>
       <p:sp>
         <p:nvSpPr>
-          <p:cNvPr id="14" name="Text 11"/>
-          <p:cNvSpPr txBox="1"/>
-          <p:nvPr/>
-        </p:nvSpPr>
-        <p:spPr>
-          <a:xfrm>
-            <a:off x="8130540" y="4622800"/>
+          <p:cNvPr id="17" name="Text 13"/>
+          <p:cNvSpPr txBox="1"/>
+          <p:nvPr/>
+        </p:nvSpPr>
+        <p:spPr>
+          <a:xfrm>
+            <a:off x="8130540" y="4892040"/>
             <a:ext cx="2788920" cy="1188720"/>
           </a:xfrm>
           <a:prstGeom prst="rect">
@@ -30454,7 +30208,7 @@
     </a:clrScheme>
     <a:fontScheme name="LabGuard">
       <a:majorFont>
-        <a:latin typeface="Microsoft YaHei"/>
+        <a:latin typeface="思源宋体"/>
         <a:ea typeface=""/>
         <a:cs typeface=""/>
         <a:font script="Jpan" typeface="游ゴシック Light"/>
@@ -30506,7 +30260,7 @@
         <a:font script="Tfng" typeface="Ebrima"/>
       </a:majorFont>
       <a:minorFont>
-        <a:latin typeface="Microsoft YaHei"/>
+        <a:latin typeface="更纱黑体 SC"/>
         <a:ea typeface=""/>
         <a:cs typeface=""/>
         <a:font script="Jpan" typeface="游ゴシック"/>
